--- a/media/module7/slides.pptx
+++ b/media/module7/slides.pptx
@@ -62,6 +62,20 @@
     <p:sldId id="310" r:id="rId62"/>
     <p:sldId id="311" r:id="rId63"/>
     <p:sldId id="312" r:id="rId64"/>
+    <p:sldId id="313" r:id="rId65"/>
+    <p:sldId id="314" r:id="rId66"/>
+    <p:sldId id="315" r:id="rId67"/>
+    <p:sldId id="316" r:id="rId68"/>
+    <p:sldId id="317" r:id="rId69"/>
+    <p:sldId id="318" r:id="rId70"/>
+    <p:sldId id="319" r:id="rId71"/>
+    <p:sldId id="320" r:id="rId72"/>
+    <p:sldId id="321" r:id="rId73"/>
+    <p:sldId id="322" r:id="rId74"/>
+    <p:sldId id="323" r:id="rId75"/>
+    <p:sldId id="324" r:id="rId76"/>
+    <p:sldId id="325" r:id="rId77"/>
+    <p:sldId id="326" r:id="rId78"/>
   </p:sldIdLst>
   <p:sldSz cx="12191695" cy="6858000" type="screen4x3"/>
   <p:notesSz cx="6858000" cy="9144000"/>
@@ -3383,6 +3397,216 @@
 </p:notes>
 </file>
 
+<file path=ppt/notesSlides/notesSlide47.xml><?xml version="1.0" encoding="utf-8"?>
+<p:notes xmlns:a="http://schemas.openxmlformats.org/drawingml/2006/main" xmlns:p="http://schemas.openxmlformats.org/presentationml/2006/main" xmlns:r="http://schemas.openxmlformats.org/officeDocument/2006/relationships">
+  <p:cSld>
+    <p:spTree>
+      <p:nvGrpSpPr>
+        <p:cNvPr id="1" name=""/>
+        <p:cNvGrpSpPr/>
+        <p:nvPr/>
+      </p:nvGrpSpPr>
+      <p:grpSpPr>
+        <a:xfrm>
+          <a:off x="0" y="0"/>
+          <a:ext cx="0" cy="0"/>
+          <a:chOff x="0" y="0"/>
+          <a:chExt cx="0" cy="0"/>
+        </a:xfrm>
+      </p:grpSpPr>
+      <p:sp>
+        <p:nvSpPr>
+          <p:cNvPr id="2" name="Slide Image Placeholder 1"/>
+          <p:cNvSpPr>
+            <a:spLocks noGrp="1"/>
+          </p:cNvSpPr>
+          <p:nvPr>
+            <p:ph type="sldImg" idx="2"/>
+          </p:nvPr>
+        </p:nvSpPr>
+        <p:spPr/>
+      </p:sp>
+      <p:sp>
+        <p:nvSpPr>
+          <p:cNvPr id="3" name="Notes Placeholder 2"/>
+          <p:cNvSpPr>
+            <a:spLocks noGrp="1"/>
+          </p:cNvSpPr>
+          <p:nvPr>
+            <p:ph type="body" idx="3" sz="quarter"/>
+          </p:nvPr>
+        </p:nvSpPr>
+        <p:spPr/>
+        <p:txBody>
+          <a:bodyPr/>
+          <a:lstStyle/>
+          <a:p>
+            <a:r>
+              <a:t>module7/examples/dma/README.md</a:t>
+            </a:r>
+          </a:p>
+        </p:txBody>
+      </p:sp>
+      <p:sp>
+        <p:nvSpPr>
+          <p:cNvPr id="4" name="Slide Number Placeholder 3"/>
+          <p:cNvSpPr>
+            <a:spLocks noGrp="1"/>
+          </p:cNvSpPr>
+          <p:nvPr>
+            <p:ph type="sldNum" idx="5" sz="quarter"/>
+          </p:nvPr>
+        </p:nvSpPr>
+        <p:spPr/>
+      </p:sp>
+    </p:spTree>
+  </p:cSld>
+  <p:clrMapOvr>
+    <a:masterClrMapping/>
+  </p:clrMapOvr>
+</p:notes>
+</file>
+
+<file path=ppt/notesSlides/notesSlide48.xml><?xml version="1.0" encoding="utf-8"?>
+<p:notes xmlns:a="http://schemas.openxmlformats.org/drawingml/2006/main" xmlns:p="http://schemas.openxmlformats.org/presentationml/2006/main" xmlns:r="http://schemas.openxmlformats.org/officeDocument/2006/relationships">
+  <p:cSld>
+    <p:spTree>
+      <p:nvGrpSpPr>
+        <p:cNvPr id="1" name=""/>
+        <p:cNvGrpSpPr/>
+        <p:nvPr/>
+      </p:nvGrpSpPr>
+      <p:grpSpPr>
+        <a:xfrm>
+          <a:off x="0" y="0"/>
+          <a:ext cx="0" cy="0"/>
+          <a:chOff x="0" y="0"/>
+          <a:chExt cx="0" cy="0"/>
+        </a:xfrm>
+      </p:grpSpPr>
+      <p:sp>
+        <p:nvSpPr>
+          <p:cNvPr id="2" name="Slide Image Placeholder 1"/>
+          <p:cNvSpPr>
+            <a:spLocks noGrp="1"/>
+          </p:cNvSpPr>
+          <p:nvPr>
+            <p:ph type="sldImg" idx="2"/>
+          </p:nvPr>
+        </p:nvSpPr>
+        <p:spPr/>
+      </p:sp>
+      <p:sp>
+        <p:nvSpPr>
+          <p:cNvPr id="3" name="Notes Placeholder 2"/>
+          <p:cNvSpPr>
+            <a:spLocks noGrp="1"/>
+          </p:cNvSpPr>
+          <p:nvPr>
+            <p:ph type="body" idx="3" sz="quarter"/>
+          </p:nvPr>
+        </p:nvSpPr>
+        <p:spPr/>
+        <p:txBody>
+          <a:bodyPr/>
+          <a:lstStyle/>
+          <a:p>
+            <a:r>
+              <a:t>Hands-on: module7/examples/dma/</a:t>
+            </a:r>
+          </a:p>
+        </p:txBody>
+      </p:sp>
+      <p:sp>
+        <p:nvSpPr>
+          <p:cNvPr id="4" name="Slide Number Placeholder 3"/>
+          <p:cNvSpPr>
+            <a:spLocks noGrp="1"/>
+          </p:cNvSpPr>
+          <p:nvPr>
+            <p:ph type="sldNum" idx="5" sz="quarter"/>
+          </p:nvPr>
+        </p:nvSpPr>
+        <p:spPr/>
+      </p:sp>
+    </p:spTree>
+  </p:cSld>
+  <p:clrMapOvr>
+    <a:masterClrMapping/>
+  </p:clrMapOvr>
+</p:notes>
+</file>
+
+<file path=ppt/notesSlides/notesSlide49.xml><?xml version="1.0" encoding="utf-8"?>
+<p:notes xmlns:a="http://schemas.openxmlformats.org/drawingml/2006/main" xmlns:p="http://schemas.openxmlformats.org/presentationml/2006/main" xmlns:r="http://schemas.openxmlformats.org/officeDocument/2006/relationships">
+  <p:cSld>
+    <p:spTree>
+      <p:nvGrpSpPr>
+        <p:cNvPr id="1" name=""/>
+        <p:cNvGrpSpPr/>
+        <p:nvPr/>
+      </p:nvGrpSpPr>
+      <p:grpSpPr>
+        <a:xfrm>
+          <a:off x="0" y="0"/>
+          <a:ext cx="0" cy="0"/>
+          <a:chOff x="0" y="0"/>
+          <a:chExt cx="0" cy="0"/>
+        </a:xfrm>
+      </p:grpSpPr>
+      <p:sp>
+        <p:nvSpPr>
+          <p:cNvPr id="2" name="Slide Image Placeholder 1"/>
+          <p:cNvSpPr>
+            <a:spLocks noGrp="1"/>
+          </p:cNvSpPr>
+          <p:nvPr>
+            <p:ph type="sldImg" idx="2"/>
+          </p:nvPr>
+        </p:nvSpPr>
+        <p:spPr/>
+      </p:sp>
+      <p:sp>
+        <p:nvSpPr>
+          <p:cNvPr id="3" name="Notes Placeholder 2"/>
+          <p:cNvSpPr>
+            <a:spLocks noGrp="1"/>
+          </p:cNvSpPr>
+          <p:nvPr>
+            <p:ph type="body" idx="3" sz="quarter"/>
+          </p:nvPr>
+        </p:nvSpPr>
+        <p:spPr/>
+        <p:txBody>
+          <a:bodyPr/>
+          <a:lstStyle/>
+          <a:p>
+            <a:r>
+              <a:t>module7/examples/protocols/README.md</a:t>
+            </a:r>
+          </a:p>
+        </p:txBody>
+      </p:sp>
+      <p:sp>
+        <p:nvSpPr>
+          <p:cNvPr id="4" name="Slide Number Placeholder 3"/>
+          <p:cNvSpPr>
+            <a:spLocks noGrp="1"/>
+          </p:cNvSpPr>
+          <p:nvPr>
+            <p:ph type="sldNum" idx="5" sz="quarter"/>
+          </p:nvPr>
+        </p:nvSpPr>
+        <p:spPr/>
+      </p:sp>
+    </p:spTree>
+  </p:cSld>
+  <p:clrMapOvr>
+    <a:masterClrMapping/>
+  </p:clrMapOvr>
+</p:notes>
+</file>
+
 <file path=ppt/notesSlides/notesSlide5.xml><?xml version="1.0" encoding="utf-8"?>
 <p:notes xmlns:a="http://schemas.openxmlformats.org/drawingml/2006/main" xmlns:p="http://schemas.openxmlformats.org/presentationml/2006/main" xmlns:r="http://schemas.openxmlformats.org/officeDocument/2006/relationships">
   <p:cSld>
@@ -3429,6 +3653,706 @@
           <a:p>
             <a:r>
               <a:t>From MODULE7 Topics Covered.</a:t>
+            </a:r>
+          </a:p>
+        </p:txBody>
+      </p:sp>
+      <p:sp>
+        <p:nvSpPr>
+          <p:cNvPr id="4" name="Slide Number Placeholder 3"/>
+          <p:cNvSpPr>
+            <a:spLocks noGrp="1"/>
+          </p:cNvSpPr>
+          <p:nvPr>
+            <p:ph type="sldNum" idx="5" sz="quarter"/>
+          </p:nvPr>
+        </p:nvSpPr>
+        <p:spPr/>
+      </p:sp>
+    </p:spTree>
+  </p:cSld>
+  <p:clrMapOvr>
+    <a:masterClrMapping/>
+  </p:clrMapOvr>
+</p:notes>
+</file>
+
+<file path=ppt/notesSlides/notesSlide50.xml><?xml version="1.0" encoding="utf-8"?>
+<p:notes xmlns:a="http://schemas.openxmlformats.org/drawingml/2006/main" xmlns:p="http://schemas.openxmlformats.org/presentationml/2006/main" xmlns:r="http://schemas.openxmlformats.org/officeDocument/2006/relationships">
+  <p:cSld>
+    <p:spTree>
+      <p:nvGrpSpPr>
+        <p:cNvPr id="1" name=""/>
+        <p:cNvGrpSpPr/>
+        <p:nvPr/>
+      </p:nvGrpSpPr>
+      <p:grpSpPr>
+        <a:xfrm>
+          <a:off x="0" y="0"/>
+          <a:ext cx="0" cy="0"/>
+          <a:chOff x="0" y="0"/>
+          <a:chExt cx="0" cy="0"/>
+        </a:xfrm>
+      </p:grpSpPr>
+      <p:sp>
+        <p:nvSpPr>
+          <p:cNvPr id="2" name="Slide Image Placeholder 1"/>
+          <p:cNvSpPr>
+            <a:spLocks noGrp="1"/>
+          </p:cNvSpPr>
+          <p:nvPr>
+            <p:ph type="sldImg" idx="2"/>
+          </p:nvPr>
+        </p:nvSpPr>
+        <p:spPr/>
+      </p:sp>
+      <p:sp>
+        <p:nvSpPr>
+          <p:cNvPr id="3" name="Notes Placeholder 2"/>
+          <p:cNvSpPr>
+            <a:spLocks noGrp="1"/>
+          </p:cNvSpPr>
+          <p:nvPr>
+            <p:ph type="body" idx="3" sz="quarter"/>
+          </p:nvPr>
+        </p:nvSpPr>
+        <p:spPr/>
+        <p:txBody>
+          <a:bodyPr/>
+          <a:lstStyle/>
+          <a:p>
+            <a:r>
+              <a:t>Hands-on: module7/examples/protocols/</a:t>
+            </a:r>
+          </a:p>
+        </p:txBody>
+      </p:sp>
+      <p:sp>
+        <p:nvSpPr>
+          <p:cNvPr id="4" name="Slide Number Placeholder 3"/>
+          <p:cNvSpPr>
+            <a:spLocks noGrp="1"/>
+          </p:cNvSpPr>
+          <p:nvPr>
+            <p:ph type="sldNum" idx="5" sz="quarter"/>
+          </p:nvPr>
+        </p:nvSpPr>
+        <p:spPr/>
+      </p:sp>
+    </p:spTree>
+  </p:cSld>
+  <p:clrMapOvr>
+    <a:masterClrMapping/>
+  </p:clrMapOvr>
+</p:notes>
+</file>
+
+<file path=ppt/notesSlides/notesSlide51.xml><?xml version="1.0" encoding="utf-8"?>
+<p:notes xmlns:a="http://schemas.openxmlformats.org/drawingml/2006/main" xmlns:p="http://schemas.openxmlformats.org/presentationml/2006/main" xmlns:r="http://schemas.openxmlformats.org/officeDocument/2006/relationships">
+  <p:cSld>
+    <p:spTree>
+      <p:nvGrpSpPr>
+        <p:cNvPr id="1" name=""/>
+        <p:cNvGrpSpPr/>
+        <p:nvPr/>
+      </p:nvGrpSpPr>
+      <p:grpSpPr>
+        <a:xfrm>
+          <a:off x="0" y="0"/>
+          <a:ext cx="0" cy="0"/>
+          <a:chOff x="0" y="0"/>
+          <a:chExt cx="0" cy="0"/>
+        </a:xfrm>
+      </p:grpSpPr>
+      <p:sp>
+        <p:nvSpPr>
+          <p:cNvPr id="2" name="Slide Image Placeholder 1"/>
+          <p:cNvSpPr>
+            <a:spLocks noGrp="1"/>
+          </p:cNvSpPr>
+          <p:nvPr>
+            <p:ph type="sldImg" idx="2"/>
+          </p:nvPr>
+        </p:nvSpPr>
+        <p:spPr/>
+      </p:sp>
+      <p:sp>
+        <p:nvSpPr>
+          <p:cNvPr id="3" name="Notes Placeholder 2"/>
+          <p:cNvSpPr>
+            <a:spLocks noGrp="1"/>
+          </p:cNvSpPr>
+          <p:nvPr>
+            <p:ph type="body" idx="3" sz="quarter"/>
+          </p:nvPr>
+        </p:nvSpPr>
+        <p:spPr/>
+        <p:txBody>
+          <a:bodyPr/>
+          <a:lstStyle/>
+          <a:p>
+            <a:r>
+              <a:t>module7/examples/protocols/README.md</a:t>
+            </a:r>
+          </a:p>
+        </p:txBody>
+      </p:sp>
+      <p:sp>
+        <p:nvSpPr>
+          <p:cNvPr id="4" name="Slide Number Placeholder 3"/>
+          <p:cNvSpPr>
+            <a:spLocks noGrp="1"/>
+          </p:cNvSpPr>
+          <p:nvPr>
+            <p:ph type="sldNum" idx="5" sz="quarter"/>
+          </p:nvPr>
+        </p:nvSpPr>
+        <p:spPr/>
+      </p:sp>
+    </p:spTree>
+  </p:cSld>
+  <p:clrMapOvr>
+    <a:masterClrMapping/>
+  </p:clrMapOvr>
+</p:notes>
+</file>
+
+<file path=ppt/notesSlides/notesSlide52.xml><?xml version="1.0" encoding="utf-8"?>
+<p:notes xmlns:a="http://schemas.openxmlformats.org/drawingml/2006/main" xmlns:p="http://schemas.openxmlformats.org/presentationml/2006/main" xmlns:r="http://schemas.openxmlformats.org/officeDocument/2006/relationships">
+  <p:cSld>
+    <p:spTree>
+      <p:nvGrpSpPr>
+        <p:cNvPr id="1" name=""/>
+        <p:cNvGrpSpPr/>
+        <p:nvPr/>
+      </p:nvGrpSpPr>
+      <p:grpSpPr>
+        <a:xfrm>
+          <a:off x="0" y="0"/>
+          <a:ext cx="0" cy="0"/>
+          <a:chOff x="0" y="0"/>
+          <a:chExt cx="0" cy="0"/>
+        </a:xfrm>
+      </p:grpSpPr>
+      <p:sp>
+        <p:nvSpPr>
+          <p:cNvPr id="2" name="Slide Image Placeholder 1"/>
+          <p:cNvSpPr>
+            <a:spLocks noGrp="1"/>
+          </p:cNvSpPr>
+          <p:nvPr>
+            <p:ph type="sldImg" idx="2"/>
+          </p:nvPr>
+        </p:nvSpPr>
+        <p:spPr/>
+      </p:sp>
+      <p:sp>
+        <p:nvSpPr>
+          <p:cNvPr id="3" name="Notes Placeholder 2"/>
+          <p:cNvSpPr>
+            <a:spLocks noGrp="1"/>
+          </p:cNvSpPr>
+          <p:nvPr>
+            <p:ph type="body" idx="3" sz="quarter"/>
+          </p:nvPr>
+        </p:nvSpPr>
+        <p:spPr/>
+        <p:txBody>
+          <a:bodyPr/>
+          <a:lstStyle/>
+          <a:p>
+            <a:r>
+              <a:t>Hands-on: module7/examples/protocols/</a:t>
+            </a:r>
+          </a:p>
+        </p:txBody>
+      </p:sp>
+      <p:sp>
+        <p:nvSpPr>
+          <p:cNvPr id="4" name="Slide Number Placeholder 3"/>
+          <p:cNvSpPr>
+            <a:spLocks noGrp="1"/>
+          </p:cNvSpPr>
+          <p:nvPr>
+            <p:ph type="sldNum" idx="5" sz="quarter"/>
+          </p:nvPr>
+        </p:nvSpPr>
+        <p:spPr/>
+      </p:sp>
+    </p:spTree>
+  </p:cSld>
+  <p:clrMapOvr>
+    <a:masterClrMapping/>
+  </p:clrMapOvr>
+</p:notes>
+</file>
+
+<file path=ppt/notesSlides/notesSlide53.xml><?xml version="1.0" encoding="utf-8"?>
+<p:notes xmlns:a="http://schemas.openxmlformats.org/drawingml/2006/main" xmlns:p="http://schemas.openxmlformats.org/presentationml/2006/main" xmlns:r="http://schemas.openxmlformats.org/officeDocument/2006/relationships">
+  <p:cSld>
+    <p:spTree>
+      <p:nvGrpSpPr>
+        <p:cNvPr id="1" name=""/>
+        <p:cNvGrpSpPr/>
+        <p:nvPr/>
+      </p:nvGrpSpPr>
+      <p:grpSpPr>
+        <a:xfrm>
+          <a:off x="0" y="0"/>
+          <a:ext cx="0" cy="0"/>
+          <a:chOff x="0" y="0"/>
+          <a:chExt cx="0" cy="0"/>
+        </a:xfrm>
+      </p:grpSpPr>
+      <p:sp>
+        <p:nvSpPr>
+          <p:cNvPr id="2" name="Slide Image Placeholder 1"/>
+          <p:cNvSpPr>
+            <a:spLocks noGrp="1"/>
+          </p:cNvSpPr>
+          <p:nvPr>
+            <p:ph type="sldImg" idx="2"/>
+          </p:nvPr>
+        </p:nvSpPr>
+        <p:spPr/>
+      </p:sp>
+      <p:sp>
+        <p:nvSpPr>
+          <p:cNvPr id="3" name="Notes Placeholder 2"/>
+          <p:cNvSpPr>
+            <a:spLocks noGrp="1"/>
+          </p:cNvSpPr>
+          <p:nvPr>
+            <p:ph type="body" idx="3" sz="quarter"/>
+          </p:nvPr>
+        </p:nvSpPr>
+        <p:spPr/>
+        <p:txBody>
+          <a:bodyPr/>
+          <a:lstStyle/>
+          <a:p>
+            <a:r>
+              <a:t>module7/examples/protocols/README.md</a:t>
+            </a:r>
+          </a:p>
+        </p:txBody>
+      </p:sp>
+      <p:sp>
+        <p:nvSpPr>
+          <p:cNvPr id="4" name="Slide Number Placeholder 3"/>
+          <p:cNvSpPr>
+            <a:spLocks noGrp="1"/>
+          </p:cNvSpPr>
+          <p:nvPr>
+            <p:ph type="sldNum" idx="5" sz="quarter"/>
+          </p:nvPr>
+        </p:nvSpPr>
+        <p:spPr/>
+      </p:sp>
+    </p:spTree>
+  </p:cSld>
+  <p:clrMapOvr>
+    <a:masterClrMapping/>
+  </p:clrMapOvr>
+</p:notes>
+</file>
+
+<file path=ppt/notesSlides/notesSlide54.xml><?xml version="1.0" encoding="utf-8"?>
+<p:notes xmlns:a="http://schemas.openxmlformats.org/drawingml/2006/main" xmlns:p="http://schemas.openxmlformats.org/presentationml/2006/main" xmlns:r="http://schemas.openxmlformats.org/officeDocument/2006/relationships">
+  <p:cSld>
+    <p:spTree>
+      <p:nvGrpSpPr>
+        <p:cNvPr id="1" name=""/>
+        <p:cNvGrpSpPr/>
+        <p:nvPr/>
+      </p:nvGrpSpPr>
+      <p:grpSpPr>
+        <a:xfrm>
+          <a:off x="0" y="0"/>
+          <a:ext cx="0" cy="0"/>
+          <a:chOff x="0" y="0"/>
+          <a:chExt cx="0" cy="0"/>
+        </a:xfrm>
+      </p:grpSpPr>
+      <p:sp>
+        <p:nvSpPr>
+          <p:cNvPr id="2" name="Slide Image Placeholder 1"/>
+          <p:cNvSpPr>
+            <a:spLocks noGrp="1"/>
+          </p:cNvSpPr>
+          <p:nvPr>
+            <p:ph type="sldImg" idx="2"/>
+          </p:nvPr>
+        </p:nvSpPr>
+        <p:spPr/>
+      </p:sp>
+      <p:sp>
+        <p:nvSpPr>
+          <p:cNvPr id="3" name="Notes Placeholder 2"/>
+          <p:cNvSpPr>
+            <a:spLocks noGrp="1"/>
+          </p:cNvSpPr>
+          <p:nvPr>
+            <p:ph type="body" idx="3" sz="quarter"/>
+          </p:nvPr>
+        </p:nvSpPr>
+        <p:spPr/>
+        <p:txBody>
+          <a:bodyPr/>
+          <a:lstStyle/>
+          <a:p>
+            <a:r>
+              <a:t>Hands-on: module7/examples/protocols/</a:t>
+            </a:r>
+          </a:p>
+        </p:txBody>
+      </p:sp>
+      <p:sp>
+        <p:nvSpPr>
+          <p:cNvPr id="4" name="Slide Number Placeholder 3"/>
+          <p:cNvSpPr>
+            <a:spLocks noGrp="1"/>
+          </p:cNvSpPr>
+          <p:nvPr>
+            <p:ph type="sldNum" idx="5" sz="quarter"/>
+          </p:nvPr>
+        </p:nvSpPr>
+        <p:spPr/>
+      </p:sp>
+    </p:spTree>
+  </p:cSld>
+  <p:clrMapOvr>
+    <a:masterClrMapping/>
+  </p:clrMapOvr>
+</p:notes>
+</file>
+
+<file path=ppt/notesSlides/notesSlide55.xml><?xml version="1.0" encoding="utf-8"?>
+<p:notes xmlns:a="http://schemas.openxmlformats.org/drawingml/2006/main" xmlns:p="http://schemas.openxmlformats.org/presentationml/2006/main" xmlns:r="http://schemas.openxmlformats.org/officeDocument/2006/relationships">
+  <p:cSld>
+    <p:spTree>
+      <p:nvGrpSpPr>
+        <p:cNvPr id="1" name=""/>
+        <p:cNvGrpSpPr/>
+        <p:nvPr/>
+      </p:nvGrpSpPr>
+      <p:grpSpPr>
+        <a:xfrm>
+          <a:off x="0" y="0"/>
+          <a:ext cx="0" cy="0"/>
+          <a:chOff x="0" y="0"/>
+          <a:chExt cx="0" cy="0"/>
+        </a:xfrm>
+      </p:grpSpPr>
+      <p:sp>
+        <p:nvSpPr>
+          <p:cNvPr id="2" name="Slide Image Placeholder 1"/>
+          <p:cNvSpPr>
+            <a:spLocks noGrp="1"/>
+          </p:cNvSpPr>
+          <p:nvPr>
+            <p:ph type="sldImg" idx="2"/>
+          </p:nvPr>
+        </p:nvSpPr>
+        <p:spPr/>
+      </p:sp>
+      <p:sp>
+        <p:nvSpPr>
+          <p:cNvPr id="3" name="Notes Placeholder 2"/>
+          <p:cNvSpPr>
+            <a:spLocks noGrp="1"/>
+          </p:cNvSpPr>
+          <p:nvPr>
+            <p:ph type="body" idx="3" sz="quarter"/>
+          </p:nvPr>
+        </p:nvSpPr>
+        <p:spPr/>
+        <p:txBody>
+          <a:bodyPr/>
+          <a:lstStyle/>
+          <a:p>
+            <a:r>
+              <a:t>module7/examples/vip/README.md</a:t>
+            </a:r>
+          </a:p>
+        </p:txBody>
+      </p:sp>
+      <p:sp>
+        <p:nvSpPr>
+          <p:cNvPr id="4" name="Slide Number Placeholder 3"/>
+          <p:cNvSpPr>
+            <a:spLocks noGrp="1"/>
+          </p:cNvSpPr>
+          <p:nvPr>
+            <p:ph type="sldNum" idx="5" sz="quarter"/>
+          </p:nvPr>
+        </p:nvSpPr>
+        <p:spPr/>
+      </p:sp>
+    </p:spTree>
+  </p:cSld>
+  <p:clrMapOvr>
+    <a:masterClrMapping/>
+  </p:clrMapOvr>
+</p:notes>
+</file>
+
+<file path=ppt/notesSlides/notesSlide56.xml><?xml version="1.0" encoding="utf-8"?>
+<p:notes xmlns:a="http://schemas.openxmlformats.org/drawingml/2006/main" xmlns:p="http://schemas.openxmlformats.org/presentationml/2006/main" xmlns:r="http://schemas.openxmlformats.org/officeDocument/2006/relationships">
+  <p:cSld>
+    <p:spTree>
+      <p:nvGrpSpPr>
+        <p:cNvPr id="1" name=""/>
+        <p:cNvGrpSpPr/>
+        <p:nvPr/>
+      </p:nvGrpSpPr>
+      <p:grpSpPr>
+        <a:xfrm>
+          <a:off x="0" y="0"/>
+          <a:ext cx="0" cy="0"/>
+          <a:chOff x="0" y="0"/>
+          <a:chExt cx="0" cy="0"/>
+        </a:xfrm>
+      </p:grpSpPr>
+      <p:sp>
+        <p:nvSpPr>
+          <p:cNvPr id="2" name="Slide Image Placeholder 1"/>
+          <p:cNvSpPr>
+            <a:spLocks noGrp="1"/>
+          </p:cNvSpPr>
+          <p:nvPr>
+            <p:ph type="sldImg" idx="2"/>
+          </p:nvPr>
+        </p:nvSpPr>
+        <p:spPr/>
+      </p:sp>
+      <p:sp>
+        <p:nvSpPr>
+          <p:cNvPr id="3" name="Notes Placeholder 2"/>
+          <p:cNvSpPr>
+            <a:spLocks noGrp="1"/>
+          </p:cNvSpPr>
+          <p:nvPr>
+            <p:ph type="body" idx="3" sz="quarter"/>
+          </p:nvPr>
+        </p:nvSpPr>
+        <p:spPr/>
+        <p:txBody>
+          <a:bodyPr/>
+          <a:lstStyle/>
+          <a:p>
+            <a:r>
+              <a:t>Hands-on: module7/examples/vip/</a:t>
+            </a:r>
+          </a:p>
+        </p:txBody>
+      </p:sp>
+      <p:sp>
+        <p:nvSpPr>
+          <p:cNvPr id="4" name="Slide Number Placeholder 3"/>
+          <p:cNvSpPr>
+            <a:spLocks noGrp="1"/>
+          </p:cNvSpPr>
+          <p:nvPr>
+            <p:ph type="sldNum" idx="5" sz="quarter"/>
+          </p:nvPr>
+        </p:nvSpPr>
+        <p:spPr/>
+      </p:sp>
+    </p:spTree>
+  </p:cSld>
+  <p:clrMapOvr>
+    <a:masterClrMapping/>
+  </p:clrMapOvr>
+</p:notes>
+</file>
+
+<file path=ppt/notesSlides/notesSlide57.xml><?xml version="1.0" encoding="utf-8"?>
+<p:notes xmlns:a="http://schemas.openxmlformats.org/drawingml/2006/main" xmlns:p="http://schemas.openxmlformats.org/presentationml/2006/main" xmlns:r="http://schemas.openxmlformats.org/officeDocument/2006/relationships">
+  <p:cSld>
+    <p:spTree>
+      <p:nvGrpSpPr>
+        <p:cNvPr id="1" name=""/>
+        <p:cNvGrpSpPr/>
+        <p:nvPr/>
+      </p:nvGrpSpPr>
+      <p:grpSpPr>
+        <a:xfrm>
+          <a:off x="0" y="0"/>
+          <a:ext cx="0" cy="0"/>
+          <a:chOff x="0" y="0"/>
+          <a:chExt cx="0" cy="0"/>
+        </a:xfrm>
+      </p:grpSpPr>
+      <p:sp>
+        <p:nvSpPr>
+          <p:cNvPr id="2" name="Slide Image Placeholder 1"/>
+          <p:cNvSpPr>
+            <a:spLocks noGrp="1"/>
+          </p:cNvSpPr>
+          <p:nvPr>
+            <p:ph type="sldImg" idx="2"/>
+          </p:nvPr>
+        </p:nvSpPr>
+        <p:spPr/>
+      </p:sp>
+      <p:sp>
+        <p:nvSpPr>
+          <p:cNvPr id="3" name="Notes Placeholder 2"/>
+          <p:cNvSpPr>
+            <a:spLocks noGrp="1"/>
+          </p:cNvSpPr>
+          <p:nvPr>
+            <p:ph type="body" idx="3" sz="quarter"/>
+          </p:nvPr>
+        </p:nvSpPr>
+        <p:spPr/>
+        <p:txBody>
+          <a:bodyPr/>
+          <a:lstStyle/>
+          <a:p>
+            <a:r>
+              <a:t>module7/examples/best_practices/README.md</a:t>
+            </a:r>
+          </a:p>
+        </p:txBody>
+      </p:sp>
+      <p:sp>
+        <p:nvSpPr>
+          <p:cNvPr id="4" name="Slide Number Placeholder 3"/>
+          <p:cNvSpPr>
+            <a:spLocks noGrp="1"/>
+          </p:cNvSpPr>
+          <p:nvPr>
+            <p:ph type="sldNum" idx="5" sz="quarter"/>
+          </p:nvPr>
+        </p:nvSpPr>
+        <p:spPr/>
+      </p:sp>
+    </p:spTree>
+  </p:cSld>
+  <p:clrMapOvr>
+    <a:masterClrMapping/>
+  </p:clrMapOvr>
+</p:notes>
+</file>
+
+<file path=ppt/notesSlides/notesSlide58.xml><?xml version="1.0" encoding="utf-8"?>
+<p:notes xmlns:a="http://schemas.openxmlformats.org/drawingml/2006/main" xmlns:p="http://schemas.openxmlformats.org/presentationml/2006/main" xmlns:r="http://schemas.openxmlformats.org/officeDocument/2006/relationships">
+  <p:cSld>
+    <p:spTree>
+      <p:nvGrpSpPr>
+        <p:cNvPr id="1" name=""/>
+        <p:cNvGrpSpPr/>
+        <p:nvPr/>
+      </p:nvGrpSpPr>
+      <p:grpSpPr>
+        <a:xfrm>
+          <a:off x="0" y="0"/>
+          <a:ext cx="0" cy="0"/>
+          <a:chOff x="0" y="0"/>
+          <a:chExt cx="0" cy="0"/>
+        </a:xfrm>
+      </p:grpSpPr>
+      <p:sp>
+        <p:nvSpPr>
+          <p:cNvPr id="2" name="Slide Image Placeholder 1"/>
+          <p:cNvSpPr>
+            <a:spLocks noGrp="1"/>
+          </p:cNvSpPr>
+          <p:nvPr>
+            <p:ph type="sldImg" idx="2"/>
+          </p:nvPr>
+        </p:nvSpPr>
+        <p:spPr/>
+      </p:sp>
+      <p:sp>
+        <p:nvSpPr>
+          <p:cNvPr id="3" name="Notes Placeholder 2"/>
+          <p:cNvSpPr>
+            <a:spLocks noGrp="1"/>
+          </p:cNvSpPr>
+          <p:nvPr>
+            <p:ph type="body" idx="3" sz="quarter"/>
+          </p:nvPr>
+        </p:nvSpPr>
+        <p:spPr/>
+        <p:txBody>
+          <a:bodyPr/>
+          <a:lstStyle/>
+          <a:p>
+            <a:r>
+              <a:t>Hands-on: module7/examples/best_practices/</a:t>
+            </a:r>
+          </a:p>
+        </p:txBody>
+      </p:sp>
+      <p:sp>
+        <p:nvSpPr>
+          <p:cNvPr id="4" name="Slide Number Placeholder 3"/>
+          <p:cNvSpPr>
+            <a:spLocks noGrp="1"/>
+          </p:cNvSpPr>
+          <p:nvPr>
+            <p:ph type="sldNum" idx="5" sz="quarter"/>
+          </p:nvPr>
+        </p:nvSpPr>
+        <p:spPr/>
+      </p:sp>
+    </p:spTree>
+  </p:cSld>
+  <p:clrMapOvr>
+    <a:masterClrMapping/>
+  </p:clrMapOvr>
+</p:notes>
+</file>
+
+<file path=ppt/notesSlides/notesSlide59.xml><?xml version="1.0" encoding="utf-8"?>
+<p:notes xmlns:a="http://schemas.openxmlformats.org/drawingml/2006/main" xmlns:p="http://schemas.openxmlformats.org/presentationml/2006/main" xmlns:r="http://schemas.openxmlformats.org/officeDocument/2006/relationships">
+  <p:cSld>
+    <p:spTree>
+      <p:nvGrpSpPr>
+        <p:cNvPr id="1" name=""/>
+        <p:cNvGrpSpPr/>
+        <p:nvPr/>
+      </p:nvGrpSpPr>
+      <p:grpSpPr>
+        <a:xfrm>
+          <a:off x="0" y="0"/>
+          <a:ext cx="0" cy="0"/>
+          <a:chOff x="0" y="0"/>
+          <a:chExt cx="0" cy="0"/>
+        </a:xfrm>
+      </p:grpSpPr>
+      <p:sp>
+        <p:nvSpPr>
+          <p:cNvPr id="2" name="Slide Image Placeholder 1"/>
+          <p:cNvSpPr>
+            <a:spLocks noGrp="1"/>
+          </p:cNvSpPr>
+          <p:nvPr>
+            <p:ph type="sldImg" idx="2"/>
+          </p:nvPr>
+        </p:nvSpPr>
+        <p:spPr/>
+      </p:sp>
+      <p:sp>
+        <p:nvSpPr>
+          <p:cNvPr id="3" name="Notes Placeholder 2"/>
+          <p:cNvSpPr>
+            <a:spLocks noGrp="1"/>
+          </p:cNvSpPr>
+          <p:nvPr>
+            <p:ph type="body" idx="3" sz="quarter"/>
+          </p:nvPr>
+        </p:nvSpPr>
+        <p:spPr/>
+        <p:txBody>
+          <a:bodyPr/>
+          <a:lstStyle/>
+          <a:p>
+            <a:r>
+              <a:t>From MODULE7 Learning Outcomes.</a:t>
             </a:r>
           </a:p>
         </p:txBody>
@@ -3499,6 +4423,76 @@
           <a:p>
             <a:r>
               <a:t>From MODULE7 Topics Covered.</a:t>
+            </a:r>
+          </a:p>
+        </p:txBody>
+      </p:sp>
+      <p:sp>
+        <p:nvSpPr>
+          <p:cNvPr id="4" name="Slide Number Placeholder 3"/>
+          <p:cNvSpPr>
+            <a:spLocks noGrp="1"/>
+          </p:cNvSpPr>
+          <p:nvPr>
+            <p:ph type="sldNum" idx="5" sz="quarter"/>
+          </p:nvPr>
+        </p:nvSpPr>
+        <p:spPr/>
+      </p:sp>
+    </p:spTree>
+  </p:cSld>
+  <p:clrMapOvr>
+    <a:masterClrMapping/>
+  </p:clrMapOvr>
+</p:notes>
+</file>
+
+<file path=ppt/notesSlides/notesSlide60.xml><?xml version="1.0" encoding="utf-8"?>
+<p:notes xmlns:a="http://schemas.openxmlformats.org/drawingml/2006/main" xmlns:p="http://schemas.openxmlformats.org/presentationml/2006/main" xmlns:r="http://schemas.openxmlformats.org/officeDocument/2006/relationships">
+  <p:cSld>
+    <p:spTree>
+      <p:nvGrpSpPr>
+        <p:cNvPr id="1" name=""/>
+        <p:cNvGrpSpPr/>
+        <p:nvPr/>
+      </p:nvGrpSpPr>
+      <p:grpSpPr>
+        <a:xfrm>
+          <a:off x="0" y="0"/>
+          <a:ext cx="0" cy="0"/>
+          <a:chOff x="0" y="0"/>
+          <a:chExt cx="0" cy="0"/>
+        </a:xfrm>
+      </p:grpSpPr>
+      <p:sp>
+        <p:nvSpPr>
+          <p:cNvPr id="2" name="Slide Image Placeholder 1"/>
+          <p:cNvSpPr>
+            <a:spLocks noGrp="1"/>
+          </p:cNvSpPr>
+          <p:nvPr>
+            <p:ph type="sldImg" idx="2"/>
+          </p:nvPr>
+        </p:nvSpPr>
+        <p:spPr/>
+      </p:sp>
+      <p:sp>
+        <p:nvSpPr>
+          <p:cNvPr id="3" name="Notes Placeholder 2"/>
+          <p:cNvSpPr>
+            <a:spLocks noGrp="1"/>
+          </p:cNvSpPr>
+          <p:nvPr>
+            <p:ph type="body" idx="3" sz="quarter"/>
+          </p:nvPr>
+        </p:nvSpPr>
+        <p:spPr/>
+        <p:txBody>
+          <a:bodyPr/>
+          <a:lstStyle/>
+          <a:p>
+            <a:r>
+              <a:t>From MODULE7 Learning Outcomes.</a:t>
             </a:r>
           </a:p>
         </p:txBody>
@@ -18752,7 +19746,7 @@
               </a:defRPr>
             </a:pPr>
             <a:r>
-              <a:t>$ ./scripts/module7.sh --check</a:t>
+              <a:t>$ ./scripts/module7.sh --dma</a:t>
             </a:r>
           </a:p>
         </p:txBody>
@@ -18846,8 +19840,8 @@
         </p:nvSpPr>
         <p:spPr>
           <a:xfrm>
-            <a:off x="548640" y="2743200"/>
-            <a:ext cx="11064240" cy="1371600"/>
+            <a:off x="548640" y="411480"/>
+            <a:ext cx="11064240" cy="777240"/>
           </a:xfrm>
           <a:prstGeom prst="rect">
             <a:avLst/>
@@ -18860,11 +19854,11 @@
           </a:bodyPr>
           <a:lstStyle/>
           <a:p>
-            <a:pPr algn="ctr">
-              <a:lnSpc>
-                <a:spcPts val="2200"/>
-              </a:lnSpc>
-              <a:defRPr sz="3600" b="1">
+            <a:pPr>
+              <a:lnSpc>
+                <a:spcPts val="2200"/>
+              </a:lnSpc>
+              <a:defRPr sz="2800" b="1">
                 <a:solidFill>
                   <a:srgbClr val="1A1A2E"/>
                 </a:solidFill>
@@ -18872,7 +19866,7 @@
               </a:defRPr>
             </a:pPr>
             <a:r>
-              <a:t>Practice &amp; assessment</a:t>
+              <a:t>Example 1: DMA Verification</a:t>
             </a:r>
           </a:p>
         </p:txBody>
@@ -18880,6 +19874,143 @@
       <p:sp>
         <p:nvSpPr>
           <p:cNvPr id="3" name="TextBox 2"/>
+          <p:cNvSpPr txBox="1"/>
+          <p:nvPr/>
+        </p:nvSpPr>
+        <p:spPr>
+          <a:xfrm>
+            <a:off x="548640" y="1234440"/>
+            <a:ext cx="11064240" cy="4937760"/>
+          </a:xfrm>
+          <a:prstGeom prst="rect">
+            <a:avLst/>
+          </a:prstGeom>
+          <a:noFill/>
+        </p:spPr>
+        <p:txBody>
+          <a:bodyPr wrap="square">
+            <a:noAutofit/>
+          </a:bodyPr>
+          <a:lstStyle/>
+          <a:p>
+            <a:pPr>
+              <a:lnSpc>
+                <a:spcPts val="2200"/>
+              </a:lnSpc>
+              <a:spcAft>
+                <a:spcPts val="1000"/>
+              </a:spcAft>
+              <a:defRPr sz="2000" b="0">
+                <a:solidFill>
+                  <a:srgbClr val="333333"/>
+                </a:solidFill>
+                <a:latin typeface="Calibri"/>
+              </a:defRPr>
+            </a:pPr>
+            <a:r>
+              <a:t>• Interface (`dma_if`): DMA interface with start,</a:t>
+            </a:r>
+          </a:p>
+          <a:p>
+            <a:pPr>
+              <a:lnSpc>
+                <a:spcPts val="2200"/>
+              </a:lnSpc>
+              <a:spcAft>
+                <a:spcPts val="1000"/>
+              </a:spcAft>
+              <a:defRPr sz="2000" b="0">
+                <a:solidFill>
+                  <a:srgbClr val="333333"/>
+                </a:solidFill>
+                <a:latin typeface="Calibri"/>
+              </a:defRPr>
+            </a:pPr>
+            <a:r>
+              <a:t>      done, addresses, length, and channel signals</a:t>
+            </a:r>
+          </a:p>
+          <a:p>
+            <a:pPr>
+              <a:lnSpc>
+                <a:spcPts val="2200"/>
+              </a:lnSpc>
+              <a:spcAft>
+                <a:spcPts val="1000"/>
+              </a:spcAft>
+              <a:defRPr sz="2000" b="0">
+                <a:solidFill>
+                  <a:srgbClr val="333333"/>
+                </a:solidFill>
+                <a:latin typeface="Calibri"/>
+              </a:defRPr>
+            </a:pPr>
+            <a:r>
+              <a:t>• Transaction (`DmaTxn`): DMA transaction with source</a:t>
+            </a:r>
+          </a:p>
+          <a:p>
+            <a:pPr>
+              <a:lnSpc>
+                <a:spcPts val="2200"/>
+              </a:lnSpc>
+              <a:spcAft>
+                <a:spcPts val="1000"/>
+              </a:spcAft>
+              <a:defRPr sz="2000" b="0">
+                <a:solidFill>
+                  <a:srgbClr val="333333"/>
+                </a:solidFill>
+                <a:latin typeface="Calibri"/>
+              </a:defRPr>
+            </a:pPr>
+            <a:r>
+              <a:t>      address, destination address, length, and chann…</a:t>
+            </a:r>
+          </a:p>
+          <a:p>
+            <a:pPr>
+              <a:lnSpc>
+                <a:spcPts val="2200"/>
+              </a:lnSpc>
+              <a:spcAft>
+                <a:spcPts val="1000"/>
+              </a:spcAft>
+              <a:defRPr sz="2000" b="0">
+                <a:solidFill>
+                  <a:srgbClr val="333333"/>
+                </a:solidFill>
+                <a:latin typeface="Calibri"/>
+              </a:defRPr>
+            </a:pPr>
+            <a:r>
+              <a:t>• Sequence (`DmaSeq`): DMA sequence generating random</a:t>
+            </a:r>
+          </a:p>
+          <a:p>
+            <a:pPr>
+              <a:lnSpc>
+                <a:spcPts val="2200"/>
+              </a:lnSpc>
+              <a:spcAft>
+                <a:spcPts val="1000"/>
+              </a:spcAft>
+              <a:defRPr sz="2000" b="0">
+                <a:solidFill>
+                  <a:srgbClr val="333333"/>
+                </a:solidFill>
+                <a:latin typeface="Calibri"/>
+              </a:defRPr>
+            </a:pPr>
+            <a:r>
+              <a:t>      DMA transfers</a:t>
+            </a:r>
+          </a:p>
+        </p:txBody>
+      </p:sp>
+      <p:sp>
+        <p:nvSpPr>
+          <p:cNvPr id="4" name="TextBox 3"/>
           <p:cNvSpPr txBox="1"/>
           <p:nvPr/>
         </p:nvSpPr>
@@ -18968,7 +20099,7 @@
               </a:defRPr>
             </a:pPr>
             <a:r>
-              <a:t>Exercises</a:t>
+              <a:t>Demo: DMA Verification</a:t>
             </a:r>
           </a:p>
         </p:txBody>
@@ -18981,13 +20112,15 @@
         </p:nvSpPr>
         <p:spPr>
           <a:xfrm>
-            <a:off x="548640" y="1234440"/>
-            <a:ext cx="11064240" cy="4937760"/>
+            <a:off x="548640" y="1051560"/>
+            <a:ext cx="11064240" cy="914400"/>
           </a:xfrm>
           <a:prstGeom prst="rect">
             <a:avLst/>
           </a:prstGeom>
-          <a:noFill/>
+          <a:solidFill>
+            <a:srgbClr val="F4F4F4"/>
+          </a:solidFill>
         </p:spPr>
         <p:txBody>
           <a:bodyPr wrap="square">
@@ -19000,100 +20133,48 @@
                 <a:spcPts val="2200"/>
               </a:lnSpc>
               <a:spcAft>
-                <a:spcPts val="1000"/>
-              </a:spcAft>
-              <a:defRPr sz="2000" b="0">
-                <a:solidFill>
-                  <a:srgbClr val="333333"/>
-                </a:solidFill>
-                <a:latin typeface="Calibri"/>
-              </a:defRPr>
-            </a:pPr>
-            <a:r>
-              <a:t>• DMA Verification</a:t>
-            </a:r>
-          </a:p>
-          <a:p>
-            <a:pPr>
-              <a:lnSpc>
-                <a:spcPts val="2200"/>
-              </a:lnSpc>
-              <a:spcAft>
-                <a:spcPts val="1000"/>
-              </a:spcAft>
-              <a:defRPr sz="2000" b="0">
-                <a:solidFill>
-                  <a:srgbClr val="333333"/>
-                </a:solidFill>
-                <a:latin typeface="Calibri"/>
-              </a:defRPr>
-            </a:pPr>
-            <a:r>
-              <a:t>• Protocol Verification</a:t>
-            </a:r>
-          </a:p>
-          <a:p>
-            <a:pPr>
-              <a:lnSpc>
-                <a:spcPts val="2200"/>
-              </a:lnSpc>
-              <a:spcAft>
-                <a:spcPts val="1000"/>
-              </a:spcAft>
-              <a:defRPr sz="2000" b="0">
-                <a:solidFill>
-                  <a:srgbClr val="333333"/>
-                </a:solidFill>
-                <a:latin typeface="Calibri"/>
-              </a:defRPr>
-            </a:pPr>
-            <a:r>
-              <a:t>• VIP Development</a:t>
-            </a:r>
-          </a:p>
-          <a:p>
-            <a:pPr>
-              <a:lnSpc>
-                <a:spcPts val="2200"/>
-              </a:lnSpc>
-              <a:spcAft>
-                <a:spcPts val="1000"/>
-              </a:spcAft>
-              <a:defRPr sz="2000" b="0">
-                <a:solidFill>
-                  <a:srgbClr val="333333"/>
-                </a:solidFill>
-                <a:latin typeface="Calibri"/>
-              </a:defRPr>
-            </a:pPr>
-            <a:r>
-              <a:t>• Best Practices</a:t>
-            </a:r>
-          </a:p>
-          <a:p>
-            <a:pPr>
-              <a:lnSpc>
-                <a:spcPts val="2200"/>
-              </a:lnSpc>
-              <a:spcAft>
-                <a:spcPts val="1000"/>
-              </a:spcAft>
-              <a:defRPr sz="2000" b="0">
-                <a:solidFill>
-                  <a:srgbClr val="333333"/>
-                </a:solidFill>
-                <a:latin typeface="Calibri"/>
-              </a:defRPr>
-            </a:pPr>
-            <a:r>
-              <a:t>• System-Level Verification</a:t>
-            </a:r>
-          </a:p>
-        </p:txBody>
-      </p:sp>
-      <p:sp>
-        <p:nvSpPr>
-          <p:cNvPr id="4" name="TextBox 3"/>
+                <a:spcPts val="200"/>
+              </a:spcAft>
+              <a:defRPr sz="2000" b="0">
+                <a:solidFill>
+                  <a:srgbClr val="333333"/>
+                </a:solidFill>
+                <a:latin typeface="Consolas"/>
+              </a:defRPr>
+            </a:pPr>
+            <a:r>
+              <a:t>$ ./scripts/module7.sh --dma</a:t>
+            </a:r>
+          </a:p>
+        </p:txBody>
+      </p:sp>
+      <p:pic>
+        <p:nvPicPr>
+          <p:cNvPr id="4" name="Picture 3" descr="ex01_dma.png"/>
+          <p:cNvPicPr>
+            <a:picLocks noChangeAspect="1"/>
+          </p:cNvPicPr>
+          <p:nvPr/>
+        </p:nvPicPr>
+        <p:blipFill>
+          <a:blip r:embed="rId2"/>
+          <a:stretch>
+            <a:fillRect/>
+          </a:stretch>
+        </p:blipFill>
+        <p:spPr>
+          <a:xfrm>
+            <a:off x="548640" y="1965960"/>
+            <a:ext cx="7071358" cy="3977639"/>
+          </a:xfrm>
+          <a:prstGeom prst="rect">
+            <a:avLst/>
+          </a:prstGeom>
+        </p:spPr>
+      </p:pic>
+      <p:sp>
+        <p:nvSpPr>
+          <p:cNvPr id="5" name="TextBox 4"/>
           <p:cNvSpPr txBox="1"/>
           <p:nvPr/>
         </p:nvSpPr>
@@ -19182,7 +20263,7 @@
               </a:defRPr>
             </a:pPr>
             <a:r>
-              <a:t>Assessment checklist</a:t>
+              <a:t>Example 2: UART Verification</a:t>
             </a:r>
           </a:p>
         </p:txBody>
@@ -19224,102 +20305,102 @@
               </a:defRPr>
             </a:pPr>
             <a:r>
-              <a:t>• Can verify complex designs (DMA, protocols)</a:t>
-            </a:r>
-          </a:p>
-          <a:p>
-            <a:pPr>
-              <a:lnSpc>
-                <a:spcPts val="2200"/>
-              </a:lnSpc>
-              <a:spcAft>
-                <a:spcPts val="1000"/>
-              </a:spcAft>
-              <a:defRPr sz="2000" b="0">
-                <a:solidFill>
-                  <a:srgbClr val="333333"/>
-                </a:solidFill>
-                <a:latin typeface="Calibri"/>
-              </a:defRPr>
-            </a:pPr>
-            <a:r>
-              <a:t>• Can develop reusable VIP</a:t>
-            </a:r>
-          </a:p>
-          <a:p>
-            <a:pPr>
-              <a:lnSpc>
-                <a:spcPts val="2200"/>
-              </a:lnSpc>
-              <a:spcAft>
-                <a:spcPts val="1000"/>
-              </a:spcAft>
-              <a:defRPr sz="2000" b="0">
-                <a:solidFill>
-                  <a:srgbClr val="333333"/>
-                </a:solidFill>
-                <a:latin typeface="Calibri"/>
-              </a:defRPr>
-            </a:pPr>
-            <a:r>
-              <a:t>• Can apply best practices</a:t>
-            </a:r>
-          </a:p>
-          <a:p>
-            <a:pPr>
-              <a:lnSpc>
-                <a:spcPts val="2200"/>
-              </a:lnSpc>
-              <a:spcAft>
-                <a:spcPts val="1000"/>
-              </a:spcAft>
-              <a:defRPr sz="2000" b="0">
-                <a:solidFill>
-                  <a:srgbClr val="333333"/>
-                </a:solidFill>
-                <a:latin typeface="Calibri"/>
-              </a:defRPr>
-            </a:pPr>
-            <a:r>
-              <a:t>• Can perform system-level verification</a:t>
-            </a:r>
-          </a:p>
-          <a:p>
-            <a:pPr>
-              <a:lnSpc>
-                <a:spcPts val="2200"/>
-              </a:lnSpc>
-              <a:spcAft>
-                <a:spcPts val="1000"/>
-              </a:spcAft>
-              <a:defRPr sz="2000" b="0">
-                <a:solidFill>
-                  <a:srgbClr val="333333"/>
-                </a:solidFill>
-                <a:latin typeface="Calibri"/>
-              </a:defRPr>
-            </a:pPr>
-            <a:r>
-              <a:t>• Can create production-quality testbenches</a:t>
-            </a:r>
-          </a:p>
-          <a:p>
-            <a:pPr>
-              <a:lnSpc>
-                <a:spcPts val="2200"/>
-              </a:lnSpc>
-              <a:spcAft>
-                <a:spcPts val="1000"/>
-              </a:spcAft>
-              <a:defRPr sz="2000" b="0">
-                <a:solidFill>
-                  <a:srgbClr val="333333"/>
-                </a:solidFill>
-                <a:latin typeface="Calibri"/>
-              </a:defRPr>
-            </a:pPr>
-            <a:r>
-              <a:t>• Understands protocol verification patterns</a:t>
+              <a:t>• Interface (`uart_if`): UART interface with TX/RX</a:t>
+            </a:r>
+          </a:p>
+          <a:p>
+            <a:pPr>
+              <a:lnSpc>
+                <a:spcPts val="2200"/>
+              </a:lnSpc>
+              <a:spcAft>
+                <a:spcPts val="1000"/>
+              </a:spcAft>
+              <a:defRPr sz="2000" b="0">
+                <a:solidFill>
+                  <a:srgbClr val="333333"/>
+                </a:solidFill>
+                <a:latin typeface="Calibri"/>
+              </a:defRPr>
+            </a:pPr>
+            <a:r>
+              <a:t>      signals and control</a:t>
+            </a:r>
+          </a:p>
+          <a:p>
+            <a:pPr>
+              <a:lnSpc>
+                <a:spcPts val="2200"/>
+              </a:lnSpc>
+              <a:spcAft>
+                <a:spcPts val="1000"/>
+              </a:spcAft>
+              <a:defRPr sz="2000" b="0">
+                <a:solidFill>
+                  <a:srgbClr val="333333"/>
+                </a:solidFill>
+                <a:latin typeface="Calibri"/>
+              </a:defRPr>
+            </a:pPr>
+            <a:r>
+              <a:t>• Transaction (`UartTxn`): UART transaction with data</a:t>
+            </a:r>
+          </a:p>
+          <a:p>
+            <a:pPr>
+              <a:lnSpc>
+                <a:spcPts val="2200"/>
+              </a:lnSpc>
+              <a:spcAft>
+                <a:spcPts val="1000"/>
+              </a:spcAft>
+              <a:defRPr sz="2000" b="0">
+                <a:solidFill>
+                  <a:srgbClr val="333333"/>
+                </a:solidFill>
+                <a:latin typeface="Calibri"/>
+              </a:defRPr>
+            </a:pPr>
+            <a:r>
+              <a:t>      field</a:t>
+            </a:r>
+          </a:p>
+          <a:p>
+            <a:pPr>
+              <a:lnSpc>
+                <a:spcPts val="2200"/>
+              </a:lnSpc>
+              <a:spcAft>
+                <a:spcPts val="1000"/>
+              </a:spcAft>
+              <a:defRPr sz="2000" b="0">
+                <a:solidFill>
+                  <a:srgbClr val="333333"/>
+                </a:solidFill>
+                <a:latin typeface="Calibri"/>
+              </a:defRPr>
+            </a:pPr>
+            <a:r>
+              <a:t>• Sequence (`UartSeq`): UART sequence generating</a:t>
+            </a:r>
+          </a:p>
+          <a:p>
+            <a:pPr>
+              <a:lnSpc>
+                <a:spcPts val="2200"/>
+              </a:lnSpc>
+              <a:spcAft>
+                <a:spcPts val="1000"/>
+              </a:spcAft>
+              <a:defRPr sz="2000" b="0">
+                <a:solidFill>
+                  <a:srgbClr val="333333"/>
+                </a:solidFill>
+                <a:latin typeface="Calibri"/>
+              </a:defRPr>
+            </a:pPr>
+            <a:r>
+              <a:t>      random UART transfers</a:t>
             </a:r>
           </a:p>
         </p:txBody>
@@ -19415,7 +20496,171 @@
               </a:defRPr>
             </a:pPr>
             <a:r>
-              <a:t>Summary &amp; next steps</a:t>
+              <a:t>Demo: UART Verification</a:t>
+            </a:r>
+          </a:p>
+        </p:txBody>
+      </p:sp>
+      <p:sp>
+        <p:nvSpPr>
+          <p:cNvPr id="3" name="TextBox 2"/>
+          <p:cNvSpPr txBox="1"/>
+          <p:nvPr/>
+        </p:nvSpPr>
+        <p:spPr>
+          <a:xfrm>
+            <a:off x="548640" y="1051560"/>
+            <a:ext cx="11064240" cy="914400"/>
+          </a:xfrm>
+          <a:prstGeom prst="rect">
+            <a:avLst/>
+          </a:prstGeom>
+          <a:solidFill>
+            <a:srgbClr val="F4F4F4"/>
+          </a:solidFill>
+        </p:spPr>
+        <p:txBody>
+          <a:bodyPr wrap="square">
+            <a:noAutofit/>
+          </a:bodyPr>
+          <a:lstStyle/>
+          <a:p>
+            <a:pPr>
+              <a:lnSpc>
+                <a:spcPts val="2200"/>
+              </a:lnSpc>
+              <a:spcAft>
+                <a:spcPts val="200"/>
+              </a:spcAft>
+              <a:defRPr sz="2000" b="0">
+                <a:solidFill>
+                  <a:srgbClr val="333333"/>
+                </a:solidFill>
+                <a:latin typeface="Consolas"/>
+              </a:defRPr>
+            </a:pPr>
+            <a:r>
+              <a:t>$ ./scripts/module7.sh --protocols</a:t>
+            </a:r>
+          </a:p>
+        </p:txBody>
+      </p:sp>
+      <p:pic>
+        <p:nvPicPr>
+          <p:cNvPr id="4" name="Picture 3" descr="ex02_protocols.png"/>
+          <p:cNvPicPr>
+            <a:picLocks noChangeAspect="1"/>
+          </p:cNvPicPr>
+          <p:nvPr/>
+        </p:nvPicPr>
+        <p:blipFill>
+          <a:blip r:embed="rId2"/>
+          <a:stretch>
+            <a:fillRect/>
+          </a:stretch>
+        </p:blipFill>
+        <p:spPr>
+          <a:xfrm>
+            <a:off x="548640" y="1965960"/>
+            <a:ext cx="7071358" cy="3977639"/>
+          </a:xfrm>
+          <a:prstGeom prst="rect">
+            <a:avLst/>
+          </a:prstGeom>
+        </p:spPr>
+      </p:pic>
+      <p:sp>
+        <p:nvSpPr>
+          <p:cNvPr id="5" name="TextBox 4"/>
+          <p:cNvSpPr txBox="1"/>
+          <p:nvPr/>
+        </p:nvSpPr>
+        <p:spPr>
+          <a:xfrm>
+            <a:off x="548640" y="6355080"/>
+            <a:ext cx="11064240" cy="320040"/>
+          </a:xfrm>
+          <a:prstGeom prst="rect">
+            <a:avLst/>
+          </a:prstGeom>
+          <a:noFill/>
+        </p:spPr>
+        <p:txBody>
+          <a:bodyPr wrap="square">
+            <a:noAutofit/>
+          </a:bodyPr>
+          <a:lstStyle/>
+          <a:p>
+            <a:pPr algn="r">
+              <a:lnSpc>
+                <a:spcPts val="2200"/>
+              </a:lnSpc>
+              <a:defRPr sz="1000" b="0">
+                <a:solidFill>
+                  <a:srgbClr val="666666"/>
+                </a:solidFill>
+                <a:latin typeface="Calibri"/>
+              </a:defRPr>
+            </a:pPr>
+            <a:r>
+              <a:t>learn_uvm2017_sv_verilator / Module 7</a:t>
+            </a:r>
+          </a:p>
+        </p:txBody>
+      </p:sp>
+    </p:spTree>
+  </p:cSld>
+  <p:clrMapOvr>
+    <a:masterClrMapping/>
+  </p:clrMapOvr>
+</p:sld>
+</file>
+
+<file path=ppt/slides/slide58.xml><?xml version="1.0" encoding="utf-8"?>
+<p:sld xmlns:a="http://schemas.openxmlformats.org/drawingml/2006/main" xmlns:p="http://schemas.openxmlformats.org/presentationml/2006/main" xmlns:r="http://schemas.openxmlformats.org/officeDocument/2006/relationships">
+  <p:cSld>
+    <p:spTree>
+      <p:nvGrpSpPr>
+        <p:cNvPr id="1" name=""/>
+        <p:cNvGrpSpPr/>
+        <p:nvPr/>
+      </p:nvGrpSpPr>
+      <p:grpSpPr/>
+      <p:sp>
+        <p:nvSpPr>
+          <p:cNvPr id="2" name="TextBox 1"/>
+          <p:cNvSpPr txBox="1"/>
+          <p:nvPr/>
+        </p:nvSpPr>
+        <p:spPr>
+          <a:xfrm>
+            <a:off x="548640" y="411480"/>
+            <a:ext cx="11064240" cy="777240"/>
+          </a:xfrm>
+          <a:prstGeom prst="rect">
+            <a:avLst/>
+          </a:prstGeom>
+          <a:noFill/>
+        </p:spPr>
+        <p:txBody>
+          <a:bodyPr wrap="square">
+            <a:noAutofit/>
+          </a:bodyPr>
+          <a:lstStyle/>
+          <a:p>
+            <a:pPr>
+              <a:lnSpc>
+                <a:spcPts val="2200"/>
+              </a:lnSpc>
+              <a:defRPr sz="2800" b="1">
+                <a:solidFill>
+                  <a:srgbClr val="1A1A2E"/>
+                </a:solidFill>
+                <a:latin typeface="Calibri"/>
+              </a:defRPr>
+            </a:pPr>
+            <a:r>
+              <a:t>Example 3: SPI Verification</a:t>
             </a:r>
           </a:p>
         </p:txBody>
@@ -19457,64 +20702,64 @@
               </a:defRPr>
             </a:pPr>
             <a:r>
-              <a:t>• Apply UVM to real-world verification scenarios</a:t>
-            </a:r>
-          </a:p>
-          <a:p>
-            <a:pPr>
-              <a:lnSpc>
-                <a:spcPts val="2200"/>
-              </a:lnSpc>
-              <a:spcAft>
-                <a:spcPts val="1000"/>
-              </a:spcAft>
-              <a:defRPr sz="2000" b="0">
-                <a:solidFill>
-                  <a:srgbClr val="333333"/>
-                </a:solidFill>
-                <a:latin typeface="Calibri"/>
-              </a:defRPr>
-            </a:pPr>
-            <a:r>
-              <a:t>• Complete module7/CHECKLIST.md</a:t>
-            </a:r>
-          </a:p>
-          <a:p>
-            <a:pPr>
-              <a:lnSpc>
-                <a:spcPts val="2200"/>
-              </a:lnSpc>
-              <a:spcAft>
-                <a:spcPts val="1000"/>
-              </a:spcAft>
-              <a:defRPr sz="2000" b="0">
-                <a:solidFill>
-                  <a:srgbClr val="333333"/>
-                </a:solidFill>
-                <a:latin typeface="Calibri"/>
-              </a:defRPr>
-            </a:pPr>
-            <a:r>
-              <a:t>• Run ./scripts/module7.sh --check</a:t>
-            </a:r>
-          </a:p>
-          <a:p>
-            <a:pPr>
-              <a:lnSpc>
-                <a:spcPts val="2200"/>
-              </a:lnSpc>
-              <a:spcAft>
-                <a:spcPts val="1000"/>
-              </a:spcAft>
-              <a:defRPr sz="2000" b="0">
-                <a:solidFill>
-                  <a:srgbClr val="333333"/>
-                </a:solidFill>
-                <a:latin typeface="Calibri"/>
-              </a:defRPr>
-            </a:pPr>
-            <a:r>
-              <a:t>• Next: Next module in course</a:t>
+              <a:t>• Test (`SpiExampleTest`): SPI verification test</a:t>
+            </a:r>
+          </a:p>
+          <a:p>
+            <a:pPr>
+              <a:lnSpc>
+                <a:spcPts val="2200"/>
+              </a:lnSpc>
+              <a:spcAft>
+                <a:spcPts val="1000"/>
+              </a:spcAft>
+              <a:defRPr sz="2000" b="0">
+                <a:solidFill>
+                  <a:srgbClr val="333333"/>
+                </a:solidFill>
+                <a:latin typeface="Calibri"/>
+              </a:defRPr>
+            </a:pPr>
+            <a:r>
+              <a:t>      scaffold</a:t>
+            </a:r>
+          </a:p>
+          <a:p>
+            <a:pPr>
+              <a:lnSpc>
+                <a:spcPts val="2200"/>
+              </a:lnSpc>
+              <a:spcAft>
+                <a:spcPts val="1000"/>
+              </a:spcAft>
+              <a:defRPr sz="2000" b="0">
+                <a:solidFill>
+                  <a:srgbClr val="333333"/>
+                </a:solidFill>
+                <a:latin typeface="Calibri"/>
+              </a:defRPr>
+            </a:pPr>
+            <a:r>
+              <a:t>• UVM Pattern: Demonstrates UVM structure for SPI</a:t>
+            </a:r>
+          </a:p>
+          <a:p>
+            <a:pPr>
+              <a:lnSpc>
+                <a:spcPts val="2200"/>
+              </a:lnSpc>
+              <a:spcAft>
+                <a:spcPts val="1000"/>
+              </a:spcAft>
+              <a:defRPr sz="2000" b="0">
+                <a:solidFill>
+                  <a:srgbClr val="333333"/>
+                </a:solidFill>
+                <a:latin typeface="Calibri"/>
+              </a:defRPr>
+            </a:pPr>
+            <a:r>
+              <a:t>      verification</a:t>
             </a:r>
           </a:p>
         </p:txBody>
@@ -19522,6 +20767,170 @@
       <p:sp>
         <p:nvSpPr>
           <p:cNvPr id="4" name="TextBox 3"/>
+          <p:cNvSpPr txBox="1"/>
+          <p:nvPr/>
+        </p:nvSpPr>
+        <p:spPr>
+          <a:xfrm>
+            <a:off x="548640" y="6355080"/>
+            <a:ext cx="11064240" cy="320040"/>
+          </a:xfrm>
+          <a:prstGeom prst="rect">
+            <a:avLst/>
+          </a:prstGeom>
+          <a:noFill/>
+        </p:spPr>
+        <p:txBody>
+          <a:bodyPr wrap="square">
+            <a:noAutofit/>
+          </a:bodyPr>
+          <a:lstStyle/>
+          <a:p>
+            <a:pPr algn="r">
+              <a:lnSpc>
+                <a:spcPts val="2200"/>
+              </a:lnSpc>
+              <a:defRPr sz="1000" b="0">
+                <a:solidFill>
+                  <a:srgbClr val="666666"/>
+                </a:solidFill>
+                <a:latin typeface="Calibri"/>
+              </a:defRPr>
+            </a:pPr>
+            <a:r>
+              <a:t>learn_uvm2017_sv_verilator / Module 7</a:t>
+            </a:r>
+          </a:p>
+        </p:txBody>
+      </p:sp>
+    </p:spTree>
+  </p:cSld>
+  <p:clrMapOvr>
+    <a:masterClrMapping/>
+  </p:clrMapOvr>
+</p:sld>
+</file>
+
+<file path=ppt/slides/slide59.xml><?xml version="1.0" encoding="utf-8"?>
+<p:sld xmlns:a="http://schemas.openxmlformats.org/drawingml/2006/main" xmlns:p="http://schemas.openxmlformats.org/presentationml/2006/main" xmlns:r="http://schemas.openxmlformats.org/officeDocument/2006/relationships">
+  <p:cSld>
+    <p:spTree>
+      <p:nvGrpSpPr>
+        <p:cNvPr id="1" name=""/>
+        <p:cNvGrpSpPr/>
+        <p:nvPr/>
+      </p:nvGrpSpPr>
+      <p:grpSpPr/>
+      <p:sp>
+        <p:nvSpPr>
+          <p:cNvPr id="2" name="TextBox 1"/>
+          <p:cNvSpPr txBox="1"/>
+          <p:nvPr/>
+        </p:nvSpPr>
+        <p:spPr>
+          <a:xfrm>
+            <a:off x="548640" y="411480"/>
+            <a:ext cx="11064240" cy="777240"/>
+          </a:xfrm>
+          <a:prstGeom prst="rect">
+            <a:avLst/>
+          </a:prstGeom>
+          <a:noFill/>
+        </p:spPr>
+        <p:txBody>
+          <a:bodyPr wrap="square">
+            <a:noAutofit/>
+          </a:bodyPr>
+          <a:lstStyle/>
+          <a:p>
+            <a:pPr>
+              <a:lnSpc>
+                <a:spcPts val="2200"/>
+              </a:lnSpc>
+              <a:defRPr sz="2800" b="1">
+                <a:solidFill>
+                  <a:srgbClr val="1A1A2E"/>
+                </a:solidFill>
+                <a:latin typeface="Calibri"/>
+              </a:defRPr>
+            </a:pPr>
+            <a:r>
+              <a:t>Demo: SPI Verification</a:t>
+            </a:r>
+          </a:p>
+        </p:txBody>
+      </p:sp>
+      <p:sp>
+        <p:nvSpPr>
+          <p:cNvPr id="3" name="TextBox 2"/>
+          <p:cNvSpPr txBox="1"/>
+          <p:nvPr/>
+        </p:nvSpPr>
+        <p:spPr>
+          <a:xfrm>
+            <a:off x="548640" y="1051560"/>
+            <a:ext cx="11064240" cy="914400"/>
+          </a:xfrm>
+          <a:prstGeom prst="rect">
+            <a:avLst/>
+          </a:prstGeom>
+          <a:solidFill>
+            <a:srgbClr val="F4F4F4"/>
+          </a:solidFill>
+        </p:spPr>
+        <p:txBody>
+          <a:bodyPr wrap="square">
+            <a:noAutofit/>
+          </a:bodyPr>
+          <a:lstStyle/>
+          <a:p>
+            <a:pPr>
+              <a:lnSpc>
+                <a:spcPts val="2200"/>
+              </a:lnSpc>
+              <a:spcAft>
+                <a:spcPts val="200"/>
+              </a:spcAft>
+              <a:defRPr sz="2000" b="0">
+                <a:solidFill>
+                  <a:srgbClr val="333333"/>
+                </a:solidFill>
+                <a:latin typeface="Consolas"/>
+              </a:defRPr>
+            </a:pPr>
+            <a:r>
+              <a:t>$ ./scripts/module7.sh --protocols</a:t>
+            </a:r>
+          </a:p>
+        </p:txBody>
+      </p:sp>
+      <p:pic>
+        <p:nvPicPr>
+          <p:cNvPr id="4" name="Picture 3" descr="ex03_protocols.png"/>
+          <p:cNvPicPr>
+            <a:picLocks noChangeAspect="1"/>
+          </p:cNvPicPr>
+          <p:nvPr/>
+        </p:nvPicPr>
+        <p:blipFill>
+          <a:blip r:embed="rId2"/>
+          <a:stretch>
+            <a:fillRect/>
+          </a:stretch>
+        </p:blipFill>
+        <p:spPr>
+          <a:xfrm>
+            <a:off x="548640" y="1965960"/>
+            <a:ext cx="7071358" cy="3977639"/>
+          </a:xfrm>
+          <a:prstGeom prst="rect">
+            <a:avLst/>
+          </a:prstGeom>
+        </p:spPr>
+      </p:pic>
+      <p:sp>
+        <p:nvSpPr>
+          <p:cNvPr id="5" name="TextBox 4"/>
           <p:cNvSpPr txBox="1"/>
           <p:nvPr/>
         </p:nvSpPr>
@@ -19662,6 +21071,1859 @@
 </p:sld>
 </file>
 
+<file path=ppt/slides/slide60.xml><?xml version="1.0" encoding="utf-8"?>
+<p:sld xmlns:a="http://schemas.openxmlformats.org/drawingml/2006/main" xmlns:p="http://schemas.openxmlformats.org/presentationml/2006/main" xmlns:r="http://schemas.openxmlformats.org/officeDocument/2006/relationships">
+  <p:cSld>
+    <p:spTree>
+      <p:nvGrpSpPr>
+        <p:cNvPr id="1" name=""/>
+        <p:cNvGrpSpPr/>
+        <p:nvPr/>
+      </p:nvGrpSpPr>
+      <p:grpSpPr/>
+      <p:sp>
+        <p:nvSpPr>
+          <p:cNvPr id="2" name="TextBox 1"/>
+          <p:cNvSpPr txBox="1"/>
+          <p:nvPr/>
+        </p:nvSpPr>
+        <p:spPr>
+          <a:xfrm>
+            <a:off x="548640" y="411480"/>
+            <a:ext cx="11064240" cy="777240"/>
+          </a:xfrm>
+          <a:prstGeom prst="rect">
+            <a:avLst/>
+          </a:prstGeom>
+          <a:noFill/>
+        </p:spPr>
+        <p:txBody>
+          <a:bodyPr wrap="square">
+            <a:noAutofit/>
+          </a:bodyPr>
+          <a:lstStyle/>
+          <a:p>
+            <a:pPr>
+              <a:lnSpc>
+                <a:spcPts val="2200"/>
+              </a:lnSpc>
+              <a:defRPr sz="2800" b="1">
+                <a:solidFill>
+                  <a:srgbClr val="1A1A2E"/>
+                </a:solidFill>
+                <a:latin typeface="Calibri"/>
+              </a:defRPr>
+            </a:pPr>
+            <a:r>
+              <a:t>Example 4: I2C Verification</a:t>
+            </a:r>
+          </a:p>
+        </p:txBody>
+      </p:sp>
+      <p:sp>
+        <p:nvSpPr>
+          <p:cNvPr id="3" name="TextBox 2"/>
+          <p:cNvSpPr txBox="1"/>
+          <p:nvPr/>
+        </p:nvSpPr>
+        <p:spPr>
+          <a:xfrm>
+            <a:off x="548640" y="1234440"/>
+            <a:ext cx="11064240" cy="4937760"/>
+          </a:xfrm>
+          <a:prstGeom prst="rect">
+            <a:avLst/>
+          </a:prstGeom>
+          <a:noFill/>
+        </p:spPr>
+        <p:txBody>
+          <a:bodyPr wrap="square">
+            <a:noAutofit/>
+          </a:bodyPr>
+          <a:lstStyle/>
+          <a:p>
+            <a:pPr>
+              <a:lnSpc>
+                <a:spcPts val="2200"/>
+              </a:lnSpc>
+              <a:spcAft>
+                <a:spcPts val="1000"/>
+              </a:spcAft>
+              <a:defRPr sz="2000" b="0">
+                <a:solidFill>
+                  <a:srgbClr val="333333"/>
+                </a:solidFill>
+                <a:latin typeface="Calibri"/>
+              </a:defRPr>
+            </a:pPr>
+            <a:r>
+              <a:t>• Test (`I2cExampleTest`): I2C verification test</a:t>
+            </a:r>
+          </a:p>
+          <a:p>
+            <a:pPr>
+              <a:lnSpc>
+                <a:spcPts val="2200"/>
+              </a:lnSpc>
+              <a:spcAft>
+                <a:spcPts val="1000"/>
+              </a:spcAft>
+              <a:defRPr sz="2000" b="0">
+                <a:solidFill>
+                  <a:srgbClr val="333333"/>
+                </a:solidFill>
+                <a:latin typeface="Calibri"/>
+              </a:defRPr>
+            </a:pPr>
+            <a:r>
+              <a:t>      scaffold</a:t>
+            </a:r>
+          </a:p>
+          <a:p>
+            <a:pPr>
+              <a:lnSpc>
+                <a:spcPts val="2200"/>
+              </a:lnSpc>
+              <a:spcAft>
+                <a:spcPts val="1000"/>
+              </a:spcAft>
+              <a:defRPr sz="2000" b="0">
+                <a:solidFill>
+                  <a:srgbClr val="333333"/>
+                </a:solidFill>
+                <a:latin typeface="Calibri"/>
+              </a:defRPr>
+            </a:pPr>
+            <a:r>
+              <a:t>• UVM Pattern: Demonstrates UVM structure for I2C</a:t>
+            </a:r>
+          </a:p>
+          <a:p>
+            <a:pPr>
+              <a:lnSpc>
+                <a:spcPts val="2200"/>
+              </a:lnSpc>
+              <a:spcAft>
+                <a:spcPts val="1000"/>
+              </a:spcAft>
+              <a:defRPr sz="2000" b="0">
+                <a:solidFill>
+                  <a:srgbClr val="333333"/>
+                </a:solidFill>
+                <a:latin typeface="Calibri"/>
+              </a:defRPr>
+            </a:pPr>
+            <a:r>
+              <a:t>      verification</a:t>
+            </a:r>
+          </a:p>
+        </p:txBody>
+      </p:sp>
+      <p:sp>
+        <p:nvSpPr>
+          <p:cNvPr id="4" name="TextBox 3"/>
+          <p:cNvSpPr txBox="1"/>
+          <p:nvPr/>
+        </p:nvSpPr>
+        <p:spPr>
+          <a:xfrm>
+            <a:off x="548640" y="6355080"/>
+            <a:ext cx="11064240" cy="320040"/>
+          </a:xfrm>
+          <a:prstGeom prst="rect">
+            <a:avLst/>
+          </a:prstGeom>
+          <a:noFill/>
+        </p:spPr>
+        <p:txBody>
+          <a:bodyPr wrap="square">
+            <a:noAutofit/>
+          </a:bodyPr>
+          <a:lstStyle/>
+          <a:p>
+            <a:pPr algn="r">
+              <a:lnSpc>
+                <a:spcPts val="2200"/>
+              </a:lnSpc>
+              <a:defRPr sz="1000" b="0">
+                <a:solidFill>
+                  <a:srgbClr val="666666"/>
+                </a:solidFill>
+                <a:latin typeface="Calibri"/>
+              </a:defRPr>
+            </a:pPr>
+            <a:r>
+              <a:t>learn_uvm2017_sv_verilator / Module 7</a:t>
+            </a:r>
+          </a:p>
+        </p:txBody>
+      </p:sp>
+    </p:spTree>
+  </p:cSld>
+  <p:clrMapOvr>
+    <a:masterClrMapping/>
+  </p:clrMapOvr>
+</p:sld>
+</file>
+
+<file path=ppt/slides/slide61.xml><?xml version="1.0" encoding="utf-8"?>
+<p:sld xmlns:a="http://schemas.openxmlformats.org/drawingml/2006/main" xmlns:p="http://schemas.openxmlformats.org/presentationml/2006/main" xmlns:r="http://schemas.openxmlformats.org/officeDocument/2006/relationships">
+  <p:cSld>
+    <p:spTree>
+      <p:nvGrpSpPr>
+        <p:cNvPr id="1" name=""/>
+        <p:cNvGrpSpPr/>
+        <p:nvPr/>
+      </p:nvGrpSpPr>
+      <p:grpSpPr/>
+      <p:sp>
+        <p:nvSpPr>
+          <p:cNvPr id="2" name="TextBox 1"/>
+          <p:cNvSpPr txBox="1"/>
+          <p:nvPr/>
+        </p:nvSpPr>
+        <p:spPr>
+          <a:xfrm>
+            <a:off x="548640" y="411480"/>
+            <a:ext cx="11064240" cy="777240"/>
+          </a:xfrm>
+          <a:prstGeom prst="rect">
+            <a:avLst/>
+          </a:prstGeom>
+          <a:noFill/>
+        </p:spPr>
+        <p:txBody>
+          <a:bodyPr wrap="square">
+            <a:noAutofit/>
+          </a:bodyPr>
+          <a:lstStyle/>
+          <a:p>
+            <a:pPr>
+              <a:lnSpc>
+                <a:spcPts val="2200"/>
+              </a:lnSpc>
+              <a:defRPr sz="2800" b="1">
+                <a:solidFill>
+                  <a:srgbClr val="1A1A2E"/>
+                </a:solidFill>
+                <a:latin typeface="Calibri"/>
+              </a:defRPr>
+            </a:pPr>
+            <a:r>
+              <a:t>Demo: I2C Verification</a:t>
+            </a:r>
+          </a:p>
+        </p:txBody>
+      </p:sp>
+      <p:sp>
+        <p:nvSpPr>
+          <p:cNvPr id="3" name="TextBox 2"/>
+          <p:cNvSpPr txBox="1"/>
+          <p:nvPr/>
+        </p:nvSpPr>
+        <p:spPr>
+          <a:xfrm>
+            <a:off x="548640" y="1051560"/>
+            <a:ext cx="11064240" cy="914400"/>
+          </a:xfrm>
+          <a:prstGeom prst="rect">
+            <a:avLst/>
+          </a:prstGeom>
+          <a:solidFill>
+            <a:srgbClr val="F4F4F4"/>
+          </a:solidFill>
+        </p:spPr>
+        <p:txBody>
+          <a:bodyPr wrap="square">
+            <a:noAutofit/>
+          </a:bodyPr>
+          <a:lstStyle/>
+          <a:p>
+            <a:pPr>
+              <a:lnSpc>
+                <a:spcPts val="2200"/>
+              </a:lnSpc>
+              <a:spcAft>
+                <a:spcPts val="200"/>
+              </a:spcAft>
+              <a:defRPr sz="2000" b="0">
+                <a:solidFill>
+                  <a:srgbClr val="333333"/>
+                </a:solidFill>
+                <a:latin typeface="Consolas"/>
+              </a:defRPr>
+            </a:pPr>
+            <a:r>
+              <a:t>$ ./scripts/module7.sh --protocols</a:t>
+            </a:r>
+          </a:p>
+        </p:txBody>
+      </p:sp>
+      <p:pic>
+        <p:nvPicPr>
+          <p:cNvPr id="4" name="Picture 3" descr="ex04_protocols.png"/>
+          <p:cNvPicPr>
+            <a:picLocks noChangeAspect="1"/>
+          </p:cNvPicPr>
+          <p:nvPr/>
+        </p:nvPicPr>
+        <p:blipFill>
+          <a:blip r:embed="rId2"/>
+          <a:stretch>
+            <a:fillRect/>
+          </a:stretch>
+        </p:blipFill>
+        <p:spPr>
+          <a:xfrm>
+            <a:off x="548640" y="1965960"/>
+            <a:ext cx="7071358" cy="3977639"/>
+          </a:xfrm>
+          <a:prstGeom prst="rect">
+            <a:avLst/>
+          </a:prstGeom>
+        </p:spPr>
+      </p:pic>
+      <p:sp>
+        <p:nvSpPr>
+          <p:cNvPr id="5" name="TextBox 4"/>
+          <p:cNvSpPr txBox="1"/>
+          <p:nvPr/>
+        </p:nvSpPr>
+        <p:spPr>
+          <a:xfrm>
+            <a:off x="548640" y="6355080"/>
+            <a:ext cx="11064240" cy="320040"/>
+          </a:xfrm>
+          <a:prstGeom prst="rect">
+            <a:avLst/>
+          </a:prstGeom>
+          <a:noFill/>
+        </p:spPr>
+        <p:txBody>
+          <a:bodyPr wrap="square">
+            <a:noAutofit/>
+          </a:bodyPr>
+          <a:lstStyle/>
+          <a:p>
+            <a:pPr algn="r">
+              <a:lnSpc>
+                <a:spcPts val="2200"/>
+              </a:lnSpc>
+              <a:defRPr sz="1000" b="0">
+                <a:solidFill>
+                  <a:srgbClr val="666666"/>
+                </a:solidFill>
+                <a:latin typeface="Calibri"/>
+              </a:defRPr>
+            </a:pPr>
+            <a:r>
+              <a:t>learn_uvm2017_sv_verilator / Module 7</a:t>
+            </a:r>
+          </a:p>
+        </p:txBody>
+      </p:sp>
+    </p:spTree>
+  </p:cSld>
+  <p:clrMapOvr>
+    <a:masterClrMapping/>
+  </p:clrMapOvr>
+</p:sld>
+</file>
+
+<file path=ppt/slides/slide62.xml><?xml version="1.0" encoding="utf-8"?>
+<p:sld xmlns:a="http://schemas.openxmlformats.org/drawingml/2006/main" xmlns:p="http://schemas.openxmlformats.org/presentationml/2006/main" xmlns:r="http://schemas.openxmlformats.org/officeDocument/2006/relationships">
+  <p:cSld>
+    <p:spTree>
+      <p:nvGrpSpPr>
+        <p:cNvPr id="1" name=""/>
+        <p:cNvGrpSpPr/>
+        <p:nvPr/>
+      </p:nvGrpSpPr>
+      <p:grpSpPr/>
+      <p:sp>
+        <p:nvSpPr>
+          <p:cNvPr id="2" name="TextBox 1"/>
+          <p:cNvSpPr txBox="1"/>
+          <p:nvPr/>
+        </p:nvSpPr>
+        <p:spPr>
+          <a:xfrm>
+            <a:off x="548640" y="411480"/>
+            <a:ext cx="11064240" cy="777240"/>
+          </a:xfrm>
+          <a:prstGeom prst="rect">
+            <a:avLst/>
+          </a:prstGeom>
+          <a:noFill/>
+        </p:spPr>
+        <p:txBody>
+          <a:bodyPr wrap="square">
+            <a:noAutofit/>
+          </a:bodyPr>
+          <a:lstStyle/>
+          <a:p>
+            <a:pPr>
+              <a:lnSpc>
+                <a:spcPts val="2200"/>
+              </a:lnSpc>
+              <a:defRPr sz="2800" b="1">
+                <a:solidFill>
+                  <a:srgbClr val="1A1A2E"/>
+                </a:solidFill>
+                <a:latin typeface="Calibri"/>
+              </a:defRPr>
+            </a:pPr>
+            <a:r>
+              <a:t>Example 5: VIP Development</a:t>
+            </a:r>
+          </a:p>
+        </p:txBody>
+      </p:sp>
+      <p:sp>
+        <p:nvSpPr>
+          <p:cNvPr id="3" name="TextBox 2"/>
+          <p:cNvSpPr txBox="1"/>
+          <p:nvPr/>
+        </p:nvSpPr>
+        <p:spPr>
+          <a:xfrm>
+            <a:off x="548640" y="1234440"/>
+            <a:ext cx="11064240" cy="4937760"/>
+          </a:xfrm>
+          <a:prstGeom prst="rect">
+            <a:avLst/>
+          </a:prstGeom>
+          <a:noFill/>
+        </p:spPr>
+        <p:txBody>
+          <a:bodyPr wrap="square">
+            <a:noAutofit/>
+          </a:bodyPr>
+          <a:lstStyle/>
+          <a:p>
+            <a:pPr>
+              <a:lnSpc>
+                <a:spcPts val="2200"/>
+              </a:lnSpc>
+              <a:spcAft>
+                <a:spcPts val="1000"/>
+              </a:spcAft>
+              <a:defRPr sz="2000" b="0">
+                <a:solidFill>
+                  <a:srgbClr val="333333"/>
+                </a:solidFill>
+                <a:latin typeface="Calibri"/>
+              </a:defRPr>
+            </a:pPr>
+            <a:r>
+              <a:t>• Transaction (`VipTxn`): VIP transaction with payload</a:t>
+            </a:r>
+          </a:p>
+          <a:p>
+            <a:pPr>
+              <a:lnSpc>
+                <a:spcPts val="2200"/>
+              </a:lnSpc>
+              <a:spcAft>
+                <a:spcPts val="1000"/>
+              </a:spcAft>
+              <a:defRPr sz="2000" b="0">
+                <a:solidFill>
+                  <a:srgbClr val="333333"/>
+                </a:solidFill>
+                <a:latin typeface="Calibri"/>
+              </a:defRPr>
+            </a:pPr>
+            <a:r>
+              <a:t>• Sequence (`VipSeq`): VIP sequence generating</a:t>
+            </a:r>
+          </a:p>
+          <a:p>
+            <a:pPr>
+              <a:lnSpc>
+                <a:spcPts val="2200"/>
+              </a:lnSpc>
+              <a:spcAft>
+                <a:spcPts val="1000"/>
+              </a:spcAft>
+              <a:defRPr sz="2000" b="0">
+                <a:solidFill>
+                  <a:srgbClr val="333333"/>
+                </a:solidFill>
+                <a:latin typeface="Calibri"/>
+              </a:defRPr>
+            </a:pPr>
+            <a:r>
+              <a:t>      transactions</a:t>
+            </a:r>
+          </a:p>
+          <a:p>
+            <a:pPr>
+              <a:lnSpc>
+                <a:spcPts val="2200"/>
+              </a:lnSpc>
+              <a:spcAft>
+                <a:spcPts val="1000"/>
+              </a:spcAft>
+              <a:defRPr sz="2000" b="0">
+                <a:solidFill>
+                  <a:srgbClr val="333333"/>
+                </a:solidFill>
+                <a:latin typeface="Calibri"/>
+              </a:defRPr>
+            </a:pPr>
+            <a:r>
+              <a:t>• Driver (`VipDriver`): VIP driver</a:t>
+            </a:r>
+          </a:p>
+        </p:txBody>
+      </p:sp>
+      <p:sp>
+        <p:nvSpPr>
+          <p:cNvPr id="4" name="TextBox 3"/>
+          <p:cNvSpPr txBox="1"/>
+          <p:nvPr/>
+        </p:nvSpPr>
+        <p:spPr>
+          <a:xfrm>
+            <a:off x="548640" y="6355080"/>
+            <a:ext cx="11064240" cy="320040"/>
+          </a:xfrm>
+          <a:prstGeom prst="rect">
+            <a:avLst/>
+          </a:prstGeom>
+          <a:noFill/>
+        </p:spPr>
+        <p:txBody>
+          <a:bodyPr wrap="square">
+            <a:noAutofit/>
+          </a:bodyPr>
+          <a:lstStyle/>
+          <a:p>
+            <a:pPr algn="r">
+              <a:lnSpc>
+                <a:spcPts val="2200"/>
+              </a:lnSpc>
+              <a:defRPr sz="1000" b="0">
+                <a:solidFill>
+                  <a:srgbClr val="666666"/>
+                </a:solidFill>
+                <a:latin typeface="Calibri"/>
+              </a:defRPr>
+            </a:pPr>
+            <a:r>
+              <a:t>learn_uvm2017_sv_verilator / Module 7</a:t>
+            </a:r>
+          </a:p>
+        </p:txBody>
+      </p:sp>
+    </p:spTree>
+  </p:cSld>
+  <p:clrMapOvr>
+    <a:masterClrMapping/>
+  </p:clrMapOvr>
+</p:sld>
+</file>
+
+<file path=ppt/slides/slide63.xml><?xml version="1.0" encoding="utf-8"?>
+<p:sld xmlns:a="http://schemas.openxmlformats.org/drawingml/2006/main" xmlns:p="http://schemas.openxmlformats.org/presentationml/2006/main" xmlns:r="http://schemas.openxmlformats.org/officeDocument/2006/relationships">
+  <p:cSld>
+    <p:spTree>
+      <p:nvGrpSpPr>
+        <p:cNvPr id="1" name=""/>
+        <p:cNvGrpSpPr/>
+        <p:nvPr/>
+      </p:nvGrpSpPr>
+      <p:grpSpPr/>
+      <p:sp>
+        <p:nvSpPr>
+          <p:cNvPr id="2" name="TextBox 1"/>
+          <p:cNvSpPr txBox="1"/>
+          <p:nvPr/>
+        </p:nvSpPr>
+        <p:spPr>
+          <a:xfrm>
+            <a:off x="548640" y="411480"/>
+            <a:ext cx="11064240" cy="777240"/>
+          </a:xfrm>
+          <a:prstGeom prst="rect">
+            <a:avLst/>
+          </a:prstGeom>
+          <a:noFill/>
+        </p:spPr>
+        <p:txBody>
+          <a:bodyPr wrap="square">
+            <a:noAutofit/>
+          </a:bodyPr>
+          <a:lstStyle/>
+          <a:p>
+            <a:pPr>
+              <a:lnSpc>
+                <a:spcPts val="2200"/>
+              </a:lnSpc>
+              <a:defRPr sz="2800" b="1">
+                <a:solidFill>
+                  <a:srgbClr val="1A1A2E"/>
+                </a:solidFill>
+                <a:latin typeface="Calibri"/>
+              </a:defRPr>
+            </a:pPr>
+            <a:r>
+              <a:t>Demo: VIP Development</a:t>
+            </a:r>
+          </a:p>
+        </p:txBody>
+      </p:sp>
+      <p:sp>
+        <p:nvSpPr>
+          <p:cNvPr id="3" name="TextBox 2"/>
+          <p:cNvSpPr txBox="1"/>
+          <p:nvPr/>
+        </p:nvSpPr>
+        <p:spPr>
+          <a:xfrm>
+            <a:off x="548640" y="1051560"/>
+            <a:ext cx="11064240" cy="914400"/>
+          </a:xfrm>
+          <a:prstGeom prst="rect">
+            <a:avLst/>
+          </a:prstGeom>
+          <a:solidFill>
+            <a:srgbClr val="F4F4F4"/>
+          </a:solidFill>
+        </p:spPr>
+        <p:txBody>
+          <a:bodyPr wrap="square">
+            <a:noAutofit/>
+          </a:bodyPr>
+          <a:lstStyle/>
+          <a:p>
+            <a:pPr>
+              <a:lnSpc>
+                <a:spcPts val="2200"/>
+              </a:lnSpc>
+              <a:spcAft>
+                <a:spcPts val="200"/>
+              </a:spcAft>
+              <a:defRPr sz="2000" b="0">
+                <a:solidFill>
+                  <a:srgbClr val="333333"/>
+                </a:solidFill>
+                <a:latin typeface="Consolas"/>
+              </a:defRPr>
+            </a:pPr>
+            <a:r>
+              <a:t>$ ./scripts/module7.sh --vip</a:t>
+            </a:r>
+          </a:p>
+        </p:txBody>
+      </p:sp>
+      <p:pic>
+        <p:nvPicPr>
+          <p:cNvPr id="4" name="Picture 3" descr="ex05_vip.png"/>
+          <p:cNvPicPr>
+            <a:picLocks noChangeAspect="1"/>
+          </p:cNvPicPr>
+          <p:nvPr/>
+        </p:nvPicPr>
+        <p:blipFill>
+          <a:blip r:embed="rId2"/>
+          <a:stretch>
+            <a:fillRect/>
+          </a:stretch>
+        </p:blipFill>
+        <p:spPr>
+          <a:xfrm>
+            <a:off x="548640" y="1965960"/>
+            <a:ext cx="7071358" cy="3977639"/>
+          </a:xfrm>
+          <a:prstGeom prst="rect">
+            <a:avLst/>
+          </a:prstGeom>
+        </p:spPr>
+      </p:pic>
+      <p:sp>
+        <p:nvSpPr>
+          <p:cNvPr id="5" name="TextBox 4"/>
+          <p:cNvSpPr txBox="1"/>
+          <p:nvPr/>
+        </p:nvSpPr>
+        <p:spPr>
+          <a:xfrm>
+            <a:off x="548640" y="6355080"/>
+            <a:ext cx="11064240" cy="320040"/>
+          </a:xfrm>
+          <a:prstGeom prst="rect">
+            <a:avLst/>
+          </a:prstGeom>
+          <a:noFill/>
+        </p:spPr>
+        <p:txBody>
+          <a:bodyPr wrap="square">
+            <a:noAutofit/>
+          </a:bodyPr>
+          <a:lstStyle/>
+          <a:p>
+            <a:pPr algn="r">
+              <a:lnSpc>
+                <a:spcPts val="2200"/>
+              </a:lnSpc>
+              <a:defRPr sz="1000" b="0">
+                <a:solidFill>
+                  <a:srgbClr val="666666"/>
+                </a:solidFill>
+                <a:latin typeface="Calibri"/>
+              </a:defRPr>
+            </a:pPr>
+            <a:r>
+              <a:t>learn_uvm2017_sv_verilator / Module 7</a:t>
+            </a:r>
+          </a:p>
+        </p:txBody>
+      </p:sp>
+    </p:spTree>
+  </p:cSld>
+  <p:clrMapOvr>
+    <a:masterClrMapping/>
+  </p:clrMapOvr>
+</p:sld>
+</file>
+
+<file path=ppt/slides/slide64.xml><?xml version="1.0" encoding="utf-8"?>
+<p:sld xmlns:a="http://schemas.openxmlformats.org/drawingml/2006/main" xmlns:p="http://schemas.openxmlformats.org/presentationml/2006/main" xmlns:r="http://schemas.openxmlformats.org/officeDocument/2006/relationships">
+  <p:cSld>
+    <p:spTree>
+      <p:nvGrpSpPr>
+        <p:cNvPr id="1" name=""/>
+        <p:cNvGrpSpPr/>
+        <p:nvPr/>
+      </p:nvGrpSpPr>
+      <p:grpSpPr/>
+      <p:sp>
+        <p:nvSpPr>
+          <p:cNvPr id="2" name="TextBox 1"/>
+          <p:cNvSpPr txBox="1"/>
+          <p:nvPr/>
+        </p:nvSpPr>
+        <p:spPr>
+          <a:xfrm>
+            <a:off x="548640" y="411480"/>
+            <a:ext cx="11064240" cy="777240"/>
+          </a:xfrm>
+          <a:prstGeom prst="rect">
+            <a:avLst/>
+          </a:prstGeom>
+          <a:noFill/>
+        </p:spPr>
+        <p:txBody>
+          <a:bodyPr wrap="square">
+            <a:noAutofit/>
+          </a:bodyPr>
+          <a:lstStyle/>
+          <a:p>
+            <a:pPr>
+              <a:lnSpc>
+                <a:spcPts val="2200"/>
+              </a:lnSpc>
+              <a:defRPr sz="2800" b="1">
+                <a:solidFill>
+                  <a:srgbClr val="1A1A2E"/>
+                </a:solidFill>
+                <a:latin typeface="Calibri"/>
+              </a:defRPr>
+            </a:pPr>
+            <a:r>
+              <a:t>Example 6: Best Practices</a:t>
+            </a:r>
+          </a:p>
+        </p:txBody>
+      </p:sp>
+      <p:sp>
+        <p:nvSpPr>
+          <p:cNvPr id="3" name="TextBox 2"/>
+          <p:cNvSpPr txBox="1"/>
+          <p:nvPr/>
+        </p:nvSpPr>
+        <p:spPr>
+          <a:xfrm>
+            <a:off x="548640" y="1234440"/>
+            <a:ext cx="11064240" cy="4937760"/>
+          </a:xfrm>
+          <a:prstGeom prst="rect">
+            <a:avLst/>
+          </a:prstGeom>
+          <a:noFill/>
+        </p:spPr>
+        <p:txBody>
+          <a:bodyPr wrap="square">
+            <a:noAutofit/>
+          </a:bodyPr>
+          <a:lstStyle/>
+          <a:p>
+            <a:pPr>
+              <a:lnSpc>
+                <a:spcPts val="2200"/>
+              </a:lnSpc>
+              <a:spcAft>
+                <a:spcPts val="1000"/>
+              </a:spcAft>
+              <a:defRPr sz="2000" b="0">
+                <a:solidFill>
+                  <a:srgbClr val="333333"/>
+                </a:solidFill>
+                <a:latin typeface="Calibri"/>
+              </a:defRPr>
+            </a:pPr>
+            <a:r>
+              <a:t>• Test (`BestPracticesTest`): Test demonstrating best</a:t>
+            </a:r>
+          </a:p>
+          <a:p>
+            <a:pPr>
+              <a:lnSpc>
+                <a:spcPts val="2200"/>
+              </a:lnSpc>
+              <a:spcAft>
+                <a:spcPts val="1000"/>
+              </a:spcAft>
+              <a:defRPr sz="2000" b="0">
+                <a:solidFill>
+                  <a:srgbClr val="333333"/>
+                </a:solidFill>
+                <a:latin typeface="Calibri"/>
+              </a:defRPr>
+            </a:pPr>
+            <a:r>
+              <a:t>      practices</a:t>
+            </a:r>
+          </a:p>
+          <a:p>
+            <a:pPr>
+              <a:lnSpc>
+                <a:spcPts val="2200"/>
+              </a:lnSpc>
+              <a:spcAft>
+                <a:spcPts val="1000"/>
+              </a:spcAft>
+              <a:defRPr sz="2000" b="0">
+                <a:solidFill>
+                  <a:srgbClr val="333333"/>
+                </a:solidFill>
+                <a:latin typeface="Calibri"/>
+              </a:defRPr>
+            </a:pPr>
+            <a:r>
+              <a:t>• Phase Organization: Proper phase usage and logging</a:t>
+            </a:r>
+          </a:p>
+          <a:p>
+            <a:pPr>
+              <a:lnSpc>
+                <a:spcPts val="2200"/>
+              </a:lnSpc>
+              <a:spcAft>
+                <a:spcPts val="1000"/>
+              </a:spcAft>
+              <a:defRPr sz="2000" b="0">
+                <a:solidFill>
+                  <a:srgbClr val="333333"/>
+                </a:solidFill>
+                <a:latin typeface="Calibri"/>
+              </a:defRPr>
+            </a:pPr>
+            <a:r>
+              <a:t>• Topology Printing: Component hierarchy visualization</a:t>
+            </a:r>
+          </a:p>
+        </p:txBody>
+      </p:sp>
+      <p:sp>
+        <p:nvSpPr>
+          <p:cNvPr id="4" name="TextBox 3"/>
+          <p:cNvSpPr txBox="1"/>
+          <p:nvPr/>
+        </p:nvSpPr>
+        <p:spPr>
+          <a:xfrm>
+            <a:off x="548640" y="6355080"/>
+            <a:ext cx="11064240" cy="320040"/>
+          </a:xfrm>
+          <a:prstGeom prst="rect">
+            <a:avLst/>
+          </a:prstGeom>
+          <a:noFill/>
+        </p:spPr>
+        <p:txBody>
+          <a:bodyPr wrap="square">
+            <a:noAutofit/>
+          </a:bodyPr>
+          <a:lstStyle/>
+          <a:p>
+            <a:pPr algn="r">
+              <a:lnSpc>
+                <a:spcPts val="2200"/>
+              </a:lnSpc>
+              <a:defRPr sz="1000" b="0">
+                <a:solidFill>
+                  <a:srgbClr val="666666"/>
+                </a:solidFill>
+                <a:latin typeface="Calibri"/>
+              </a:defRPr>
+            </a:pPr>
+            <a:r>
+              <a:t>learn_uvm2017_sv_verilator / Module 7</a:t>
+            </a:r>
+          </a:p>
+        </p:txBody>
+      </p:sp>
+    </p:spTree>
+  </p:cSld>
+  <p:clrMapOvr>
+    <a:masterClrMapping/>
+  </p:clrMapOvr>
+</p:sld>
+</file>
+
+<file path=ppt/slides/slide65.xml><?xml version="1.0" encoding="utf-8"?>
+<p:sld xmlns:a="http://schemas.openxmlformats.org/drawingml/2006/main" xmlns:p="http://schemas.openxmlformats.org/presentationml/2006/main" xmlns:r="http://schemas.openxmlformats.org/officeDocument/2006/relationships">
+  <p:cSld>
+    <p:spTree>
+      <p:nvGrpSpPr>
+        <p:cNvPr id="1" name=""/>
+        <p:cNvGrpSpPr/>
+        <p:nvPr/>
+      </p:nvGrpSpPr>
+      <p:grpSpPr/>
+      <p:sp>
+        <p:nvSpPr>
+          <p:cNvPr id="2" name="TextBox 1"/>
+          <p:cNvSpPr txBox="1"/>
+          <p:nvPr/>
+        </p:nvSpPr>
+        <p:spPr>
+          <a:xfrm>
+            <a:off x="548640" y="411480"/>
+            <a:ext cx="11064240" cy="777240"/>
+          </a:xfrm>
+          <a:prstGeom prst="rect">
+            <a:avLst/>
+          </a:prstGeom>
+          <a:noFill/>
+        </p:spPr>
+        <p:txBody>
+          <a:bodyPr wrap="square">
+            <a:noAutofit/>
+          </a:bodyPr>
+          <a:lstStyle/>
+          <a:p>
+            <a:pPr>
+              <a:lnSpc>
+                <a:spcPts val="2200"/>
+              </a:lnSpc>
+              <a:defRPr sz="2800" b="1">
+                <a:solidFill>
+                  <a:srgbClr val="1A1A2E"/>
+                </a:solidFill>
+                <a:latin typeface="Calibri"/>
+              </a:defRPr>
+            </a:pPr>
+            <a:r>
+              <a:t>Demo: Best Practices</a:t>
+            </a:r>
+          </a:p>
+        </p:txBody>
+      </p:sp>
+      <p:sp>
+        <p:nvSpPr>
+          <p:cNvPr id="3" name="TextBox 2"/>
+          <p:cNvSpPr txBox="1"/>
+          <p:nvPr/>
+        </p:nvSpPr>
+        <p:spPr>
+          <a:xfrm>
+            <a:off x="548640" y="1051560"/>
+            <a:ext cx="11064240" cy="914400"/>
+          </a:xfrm>
+          <a:prstGeom prst="rect">
+            <a:avLst/>
+          </a:prstGeom>
+          <a:solidFill>
+            <a:srgbClr val="F4F4F4"/>
+          </a:solidFill>
+        </p:spPr>
+        <p:txBody>
+          <a:bodyPr wrap="square">
+            <a:noAutofit/>
+          </a:bodyPr>
+          <a:lstStyle/>
+          <a:p>
+            <a:pPr>
+              <a:lnSpc>
+                <a:spcPts val="2200"/>
+              </a:lnSpc>
+              <a:spcAft>
+                <a:spcPts val="200"/>
+              </a:spcAft>
+              <a:defRPr sz="2000" b="0">
+                <a:solidFill>
+                  <a:srgbClr val="333333"/>
+                </a:solidFill>
+                <a:latin typeface="Consolas"/>
+              </a:defRPr>
+            </a:pPr>
+            <a:r>
+              <a:t>$ ./scripts/module7.sh --best-practices</a:t>
+            </a:r>
+          </a:p>
+        </p:txBody>
+      </p:sp>
+      <p:pic>
+        <p:nvPicPr>
+          <p:cNvPr id="4" name="Picture 3" descr="ex06_best_practices.png"/>
+          <p:cNvPicPr>
+            <a:picLocks noChangeAspect="1"/>
+          </p:cNvPicPr>
+          <p:nvPr/>
+        </p:nvPicPr>
+        <p:blipFill>
+          <a:blip r:embed="rId2"/>
+          <a:stretch>
+            <a:fillRect/>
+          </a:stretch>
+        </p:blipFill>
+        <p:spPr>
+          <a:xfrm>
+            <a:off x="548640" y="1965960"/>
+            <a:ext cx="7071358" cy="3977639"/>
+          </a:xfrm>
+          <a:prstGeom prst="rect">
+            <a:avLst/>
+          </a:prstGeom>
+        </p:spPr>
+      </p:pic>
+      <p:sp>
+        <p:nvSpPr>
+          <p:cNvPr id="5" name="TextBox 4"/>
+          <p:cNvSpPr txBox="1"/>
+          <p:nvPr/>
+        </p:nvSpPr>
+        <p:spPr>
+          <a:xfrm>
+            <a:off x="548640" y="6355080"/>
+            <a:ext cx="11064240" cy="320040"/>
+          </a:xfrm>
+          <a:prstGeom prst="rect">
+            <a:avLst/>
+          </a:prstGeom>
+          <a:noFill/>
+        </p:spPr>
+        <p:txBody>
+          <a:bodyPr wrap="square">
+            <a:noAutofit/>
+          </a:bodyPr>
+          <a:lstStyle/>
+          <a:p>
+            <a:pPr algn="r">
+              <a:lnSpc>
+                <a:spcPts val="2200"/>
+              </a:lnSpc>
+              <a:defRPr sz="1000" b="0">
+                <a:solidFill>
+                  <a:srgbClr val="666666"/>
+                </a:solidFill>
+                <a:latin typeface="Calibri"/>
+              </a:defRPr>
+            </a:pPr>
+            <a:r>
+              <a:t>learn_uvm2017_sv_verilator / Module 7</a:t>
+            </a:r>
+          </a:p>
+        </p:txBody>
+      </p:sp>
+    </p:spTree>
+  </p:cSld>
+  <p:clrMapOvr>
+    <a:masterClrMapping/>
+  </p:clrMapOvr>
+</p:sld>
+</file>
+
+<file path=ppt/slides/slide66.xml><?xml version="1.0" encoding="utf-8"?>
+<p:sld xmlns:a="http://schemas.openxmlformats.org/drawingml/2006/main" xmlns:p="http://schemas.openxmlformats.org/presentationml/2006/main" xmlns:r="http://schemas.openxmlformats.org/officeDocument/2006/relationships">
+  <p:cSld>
+    <p:spTree>
+      <p:nvGrpSpPr>
+        <p:cNvPr id="1" name=""/>
+        <p:cNvGrpSpPr/>
+        <p:nvPr/>
+      </p:nvGrpSpPr>
+      <p:grpSpPr/>
+      <p:sp>
+        <p:nvSpPr>
+          <p:cNvPr id="2" name="TextBox 1"/>
+          <p:cNvSpPr txBox="1"/>
+          <p:nvPr/>
+        </p:nvSpPr>
+        <p:spPr>
+          <a:xfrm>
+            <a:off x="548640" y="2743200"/>
+            <a:ext cx="11064240" cy="1371600"/>
+          </a:xfrm>
+          <a:prstGeom prst="rect">
+            <a:avLst/>
+          </a:prstGeom>
+          <a:noFill/>
+        </p:spPr>
+        <p:txBody>
+          <a:bodyPr wrap="square">
+            <a:noAutofit/>
+          </a:bodyPr>
+          <a:lstStyle/>
+          <a:p>
+            <a:pPr algn="ctr">
+              <a:lnSpc>
+                <a:spcPts val="2200"/>
+              </a:lnSpc>
+              <a:defRPr sz="3600" b="1">
+                <a:solidFill>
+                  <a:srgbClr val="1A1A2E"/>
+                </a:solidFill>
+                <a:latin typeface="Calibri"/>
+              </a:defRPr>
+            </a:pPr>
+            <a:r>
+              <a:t>Practice &amp; assessment</a:t>
+            </a:r>
+          </a:p>
+        </p:txBody>
+      </p:sp>
+      <p:sp>
+        <p:nvSpPr>
+          <p:cNvPr id="3" name="TextBox 2"/>
+          <p:cNvSpPr txBox="1"/>
+          <p:nvPr/>
+        </p:nvSpPr>
+        <p:spPr>
+          <a:xfrm>
+            <a:off x="548640" y="6355080"/>
+            <a:ext cx="11064240" cy="320040"/>
+          </a:xfrm>
+          <a:prstGeom prst="rect">
+            <a:avLst/>
+          </a:prstGeom>
+          <a:noFill/>
+        </p:spPr>
+        <p:txBody>
+          <a:bodyPr wrap="square">
+            <a:noAutofit/>
+          </a:bodyPr>
+          <a:lstStyle/>
+          <a:p>
+            <a:pPr algn="r">
+              <a:lnSpc>
+                <a:spcPts val="2200"/>
+              </a:lnSpc>
+              <a:defRPr sz="1000" b="0">
+                <a:solidFill>
+                  <a:srgbClr val="666666"/>
+                </a:solidFill>
+                <a:latin typeface="Calibri"/>
+              </a:defRPr>
+            </a:pPr>
+            <a:r>
+              <a:t>learn_uvm2017_sv_verilator / Module 7</a:t>
+            </a:r>
+          </a:p>
+        </p:txBody>
+      </p:sp>
+    </p:spTree>
+  </p:cSld>
+  <p:clrMapOvr>
+    <a:masterClrMapping/>
+  </p:clrMapOvr>
+</p:sld>
+</file>
+
+<file path=ppt/slides/slide67.xml><?xml version="1.0" encoding="utf-8"?>
+<p:sld xmlns:a="http://schemas.openxmlformats.org/drawingml/2006/main" xmlns:p="http://schemas.openxmlformats.org/presentationml/2006/main" xmlns:r="http://schemas.openxmlformats.org/officeDocument/2006/relationships">
+  <p:cSld>
+    <p:spTree>
+      <p:nvGrpSpPr>
+        <p:cNvPr id="1" name=""/>
+        <p:cNvGrpSpPr/>
+        <p:nvPr/>
+      </p:nvGrpSpPr>
+      <p:grpSpPr/>
+      <p:sp>
+        <p:nvSpPr>
+          <p:cNvPr id="2" name="TextBox 1"/>
+          <p:cNvSpPr txBox="1"/>
+          <p:nvPr/>
+        </p:nvSpPr>
+        <p:spPr>
+          <a:xfrm>
+            <a:off x="548640" y="411480"/>
+            <a:ext cx="11064240" cy="777240"/>
+          </a:xfrm>
+          <a:prstGeom prst="rect">
+            <a:avLst/>
+          </a:prstGeom>
+          <a:noFill/>
+        </p:spPr>
+        <p:txBody>
+          <a:bodyPr wrap="square">
+            <a:noAutofit/>
+          </a:bodyPr>
+          <a:lstStyle/>
+          <a:p>
+            <a:pPr>
+              <a:lnSpc>
+                <a:spcPts val="2200"/>
+              </a:lnSpc>
+              <a:defRPr sz="2800" b="1">
+                <a:solidFill>
+                  <a:srgbClr val="1A1A2E"/>
+                </a:solidFill>
+                <a:latin typeface="Calibri"/>
+              </a:defRPr>
+            </a:pPr>
+            <a:r>
+              <a:t>What you should know (1/2)</a:t>
+            </a:r>
+          </a:p>
+        </p:txBody>
+      </p:sp>
+      <p:sp>
+        <p:nvSpPr>
+          <p:cNvPr id="3" name="TextBox 2"/>
+          <p:cNvSpPr txBox="1"/>
+          <p:nvPr/>
+        </p:nvSpPr>
+        <p:spPr>
+          <a:xfrm>
+            <a:off x="548640" y="1234440"/>
+            <a:ext cx="11064240" cy="4937760"/>
+          </a:xfrm>
+          <a:prstGeom prst="rect">
+            <a:avLst/>
+          </a:prstGeom>
+          <a:noFill/>
+        </p:spPr>
+        <p:txBody>
+          <a:bodyPr wrap="square">
+            <a:noAutofit/>
+          </a:bodyPr>
+          <a:lstStyle/>
+          <a:p>
+            <a:pPr>
+              <a:lnSpc>
+                <a:spcPts val="2200"/>
+              </a:lnSpc>
+              <a:spcAft>
+                <a:spcPts val="1000"/>
+              </a:spcAft>
+              <a:defRPr sz="2000" b="0">
+                <a:solidFill>
+                  <a:srgbClr val="333333"/>
+                </a:solidFill>
+                <a:latin typeface="Calibri"/>
+              </a:defRPr>
+            </a:pPr>
+            <a:r>
+              <a:t>• Verify complex designs (DMA, protocols) using UVM</a:t>
+            </a:r>
+          </a:p>
+          <a:p>
+            <a:pPr>
+              <a:lnSpc>
+                <a:spcPts val="2200"/>
+              </a:lnSpc>
+              <a:spcAft>
+                <a:spcPts val="1000"/>
+              </a:spcAft>
+              <a:defRPr sz="2000" b="0">
+                <a:solidFill>
+                  <a:srgbClr val="333333"/>
+                </a:solidFill>
+                <a:latin typeface="Calibri"/>
+              </a:defRPr>
+            </a:pPr>
+            <a:r>
+              <a:t>      patterns</a:t>
+            </a:r>
+          </a:p>
+          <a:p>
+            <a:pPr>
+              <a:lnSpc>
+                <a:spcPts val="2200"/>
+              </a:lnSpc>
+              <a:spcAft>
+                <a:spcPts val="1000"/>
+              </a:spcAft>
+              <a:defRPr sz="2000" b="0">
+                <a:solidFill>
+                  <a:srgbClr val="333333"/>
+                </a:solidFill>
+                <a:latin typeface="Calibri"/>
+              </a:defRPr>
+            </a:pPr>
+            <a:r>
+              <a:t>• Develop reusable VIP with proper architecture</a:t>
+            </a:r>
+          </a:p>
+          <a:p>
+            <a:pPr>
+              <a:lnSpc>
+                <a:spcPts val="2200"/>
+              </a:lnSpc>
+              <a:spcAft>
+                <a:spcPts val="1000"/>
+              </a:spcAft>
+              <a:defRPr sz="2000" b="0">
+                <a:solidFill>
+                  <a:srgbClr val="333333"/>
+                </a:solidFill>
+                <a:latin typeface="Calibri"/>
+              </a:defRPr>
+            </a:pPr>
+            <a:r>
+              <a:t>• Apply best practices for code organization and</a:t>
+            </a:r>
+          </a:p>
+          <a:p>
+            <a:pPr>
+              <a:lnSpc>
+                <a:spcPts val="2200"/>
+              </a:lnSpc>
+              <a:spcAft>
+                <a:spcPts val="1000"/>
+              </a:spcAft>
+              <a:defRPr sz="2000" b="0">
+                <a:solidFill>
+                  <a:srgbClr val="333333"/>
+                </a:solidFill>
+                <a:latin typeface="Calibri"/>
+              </a:defRPr>
+            </a:pPr>
+            <a:r>
+              <a:t>      maintainability</a:t>
+            </a:r>
+          </a:p>
+          <a:p>
+            <a:pPr>
+              <a:lnSpc>
+                <a:spcPts val="2200"/>
+              </a:lnSpc>
+              <a:spcAft>
+                <a:spcPts val="1000"/>
+              </a:spcAft>
+              <a:defRPr sz="2000" b="0">
+                <a:solidFill>
+                  <a:srgbClr val="333333"/>
+                </a:solidFill>
+                <a:latin typeface="Calibri"/>
+              </a:defRPr>
+            </a:pPr>
+            <a:r>
+              <a:t>• Perform system-level verification with multiple DUTs</a:t>
+            </a:r>
+          </a:p>
+          <a:p>
+            <a:pPr>
+              <a:lnSpc>
+                <a:spcPts val="2200"/>
+              </a:lnSpc>
+              <a:spcAft>
+                <a:spcPts val="1000"/>
+              </a:spcAft>
+              <a:defRPr sz="2000" b="0">
+                <a:solidFill>
+                  <a:srgbClr val="333333"/>
+                </a:solidFill>
+                <a:latin typeface="Calibri"/>
+              </a:defRPr>
+            </a:pPr>
+            <a:r>
+              <a:t>• Create production-quality testbenches</a:t>
+            </a:r>
+          </a:p>
+          <a:p>
+            <a:pPr>
+              <a:lnSpc>
+                <a:spcPts val="2200"/>
+              </a:lnSpc>
+              <a:spcAft>
+                <a:spcPts val="1000"/>
+              </a:spcAft>
+              <a:defRPr sz="2000" b="0">
+                <a:solidFill>
+                  <a:srgbClr val="333333"/>
+                </a:solidFill>
+                <a:latin typeface="Calibri"/>
+              </a:defRPr>
+            </a:pPr>
+            <a:r>
+              <a:t>• Understand protocol verification patterns</a:t>
+            </a:r>
+          </a:p>
+        </p:txBody>
+      </p:sp>
+      <p:sp>
+        <p:nvSpPr>
+          <p:cNvPr id="4" name="TextBox 3"/>
+          <p:cNvSpPr txBox="1"/>
+          <p:nvPr/>
+        </p:nvSpPr>
+        <p:spPr>
+          <a:xfrm>
+            <a:off x="548640" y="6355080"/>
+            <a:ext cx="11064240" cy="320040"/>
+          </a:xfrm>
+          <a:prstGeom prst="rect">
+            <a:avLst/>
+          </a:prstGeom>
+          <a:noFill/>
+        </p:spPr>
+        <p:txBody>
+          <a:bodyPr wrap="square">
+            <a:noAutofit/>
+          </a:bodyPr>
+          <a:lstStyle/>
+          <a:p>
+            <a:pPr algn="r">
+              <a:lnSpc>
+                <a:spcPts val="2200"/>
+              </a:lnSpc>
+              <a:defRPr sz="1000" b="0">
+                <a:solidFill>
+                  <a:srgbClr val="666666"/>
+                </a:solidFill>
+                <a:latin typeface="Calibri"/>
+              </a:defRPr>
+            </a:pPr>
+            <a:r>
+              <a:t>learn_uvm2017_sv_verilator / Module 7</a:t>
+            </a:r>
+          </a:p>
+        </p:txBody>
+      </p:sp>
+    </p:spTree>
+  </p:cSld>
+  <p:clrMapOvr>
+    <a:masterClrMapping/>
+  </p:clrMapOvr>
+</p:sld>
+</file>
+
+<file path=ppt/slides/slide68.xml><?xml version="1.0" encoding="utf-8"?>
+<p:sld xmlns:a="http://schemas.openxmlformats.org/drawingml/2006/main" xmlns:p="http://schemas.openxmlformats.org/presentationml/2006/main" xmlns:r="http://schemas.openxmlformats.org/officeDocument/2006/relationships">
+  <p:cSld>
+    <p:spTree>
+      <p:nvGrpSpPr>
+        <p:cNvPr id="1" name=""/>
+        <p:cNvGrpSpPr/>
+        <p:nvPr/>
+      </p:nvGrpSpPr>
+      <p:grpSpPr/>
+      <p:sp>
+        <p:nvSpPr>
+          <p:cNvPr id="2" name="TextBox 1"/>
+          <p:cNvSpPr txBox="1"/>
+          <p:nvPr/>
+        </p:nvSpPr>
+        <p:spPr>
+          <a:xfrm>
+            <a:off x="548640" y="411480"/>
+            <a:ext cx="11064240" cy="777240"/>
+          </a:xfrm>
+          <a:prstGeom prst="rect">
+            <a:avLst/>
+          </a:prstGeom>
+          <a:noFill/>
+        </p:spPr>
+        <p:txBody>
+          <a:bodyPr wrap="square">
+            <a:noAutofit/>
+          </a:bodyPr>
+          <a:lstStyle/>
+          <a:p>
+            <a:pPr>
+              <a:lnSpc>
+                <a:spcPts val="2200"/>
+              </a:lnSpc>
+              <a:defRPr sz="2800" b="1">
+                <a:solidFill>
+                  <a:srgbClr val="1A1A2E"/>
+                </a:solidFill>
+                <a:latin typeface="Calibri"/>
+              </a:defRPr>
+            </a:pPr>
+            <a:r>
+              <a:t>What you should know (2/2)</a:t>
+            </a:r>
+          </a:p>
+        </p:txBody>
+      </p:sp>
+      <p:sp>
+        <p:nvSpPr>
+          <p:cNvPr id="3" name="TextBox 2"/>
+          <p:cNvSpPr txBox="1"/>
+          <p:nvPr/>
+        </p:nvSpPr>
+        <p:spPr>
+          <a:xfrm>
+            <a:off x="548640" y="1234440"/>
+            <a:ext cx="11064240" cy="4937760"/>
+          </a:xfrm>
+          <a:prstGeom prst="rect">
+            <a:avLst/>
+          </a:prstGeom>
+          <a:noFill/>
+        </p:spPr>
+        <p:txBody>
+          <a:bodyPr wrap="square">
+            <a:noAutofit/>
+          </a:bodyPr>
+          <a:lstStyle/>
+          <a:p>
+            <a:pPr>
+              <a:lnSpc>
+                <a:spcPts val="2200"/>
+              </a:lnSpc>
+              <a:spcAft>
+                <a:spcPts val="1000"/>
+              </a:spcAft>
+              <a:defRPr sz="2000" b="0">
+                <a:solidFill>
+                  <a:srgbClr val="333333"/>
+                </a:solidFill>
+                <a:latin typeface="Calibri"/>
+              </a:defRPr>
+            </a:pPr>
+            <a:r>
+              <a:t>• Package verification components for reuse</a:t>
+            </a:r>
+          </a:p>
+          <a:p>
+            <a:pPr>
+              <a:lnSpc>
+                <a:spcPts val="2200"/>
+              </a:lnSpc>
+              <a:spcAft>
+                <a:spcPts val="1000"/>
+              </a:spcAft>
+              <a:defRPr sz="2000" b="0">
+                <a:solidFill>
+                  <a:srgbClr val="333333"/>
+                </a:solidFill>
+                <a:latin typeface="Calibri"/>
+              </a:defRPr>
+            </a:pPr>
+            <a:r>
+              <a:t>• Use topology printing for debugging</a:t>
+            </a:r>
+          </a:p>
+          <a:p>
+            <a:pPr>
+              <a:lnSpc>
+                <a:spcPts val="2200"/>
+              </a:lnSpc>
+              <a:spcAft>
+                <a:spcPts val="1000"/>
+              </a:spcAft>
+              <a:defRPr sz="2000" b="0">
+                <a:solidFill>
+                  <a:srgbClr val="333333"/>
+                </a:solidFill>
+                <a:latin typeface="Calibri"/>
+              </a:defRPr>
+            </a:pPr>
+            <a:r>
+              <a:t>• Implement phase-based logging</a:t>
+            </a:r>
+          </a:p>
+          <a:p>
+            <a:pPr>
+              <a:lnSpc>
+                <a:spcPts val="2200"/>
+              </a:lnSpc>
+              <a:spcAft>
+                <a:spcPts val="1000"/>
+              </a:spcAft>
+              <a:defRPr sz="2000" b="0">
+                <a:solidFill>
+                  <a:srgbClr val="333333"/>
+                </a:solidFill>
+                <a:latin typeface="Calibri"/>
+              </a:defRPr>
+            </a:pPr>
+            <a:r>
+              <a:t>• Apply real-world verification patterns</a:t>
+            </a:r>
+          </a:p>
+        </p:txBody>
+      </p:sp>
+      <p:sp>
+        <p:nvSpPr>
+          <p:cNvPr id="4" name="TextBox 3"/>
+          <p:cNvSpPr txBox="1"/>
+          <p:nvPr/>
+        </p:nvSpPr>
+        <p:spPr>
+          <a:xfrm>
+            <a:off x="548640" y="6355080"/>
+            <a:ext cx="11064240" cy="320040"/>
+          </a:xfrm>
+          <a:prstGeom prst="rect">
+            <a:avLst/>
+          </a:prstGeom>
+          <a:noFill/>
+        </p:spPr>
+        <p:txBody>
+          <a:bodyPr wrap="square">
+            <a:noAutofit/>
+          </a:bodyPr>
+          <a:lstStyle/>
+          <a:p>
+            <a:pPr algn="r">
+              <a:lnSpc>
+                <a:spcPts val="2200"/>
+              </a:lnSpc>
+              <a:defRPr sz="1000" b="0">
+                <a:solidFill>
+                  <a:srgbClr val="666666"/>
+                </a:solidFill>
+                <a:latin typeface="Calibri"/>
+              </a:defRPr>
+            </a:pPr>
+            <a:r>
+              <a:t>learn_uvm2017_sv_verilator / Module 7</a:t>
+            </a:r>
+          </a:p>
+        </p:txBody>
+      </p:sp>
+    </p:spTree>
+  </p:cSld>
+  <p:clrMapOvr>
+    <a:masterClrMapping/>
+  </p:clrMapOvr>
+</p:sld>
+</file>
+
+<file path=ppt/slides/slide69.xml><?xml version="1.0" encoding="utf-8"?>
+<p:sld xmlns:a="http://schemas.openxmlformats.org/drawingml/2006/main" xmlns:p="http://schemas.openxmlformats.org/presentationml/2006/main" xmlns:r="http://schemas.openxmlformats.org/officeDocument/2006/relationships">
+  <p:cSld>
+    <p:spTree>
+      <p:nvGrpSpPr>
+        <p:cNvPr id="1" name=""/>
+        <p:cNvGrpSpPr/>
+        <p:nvPr/>
+      </p:nvGrpSpPr>
+      <p:grpSpPr/>
+      <p:sp>
+        <p:nvSpPr>
+          <p:cNvPr id="2" name="TextBox 1"/>
+          <p:cNvSpPr txBox="1"/>
+          <p:nvPr/>
+        </p:nvSpPr>
+        <p:spPr>
+          <a:xfrm>
+            <a:off x="548640" y="411480"/>
+            <a:ext cx="11064240" cy="777240"/>
+          </a:xfrm>
+          <a:prstGeom prst="rect">
+            <a:avLst/>
+          </a:prstGeom>
+          <a:noFill/>
+        </p:spPr>
+        <p:txBody>
+          <a:bodyPr wrap="square">
+            <a:noAutofit/>
+          </a:bodyPr>
+          <a:lstStyle/>
+          <a:p>
+            <a:pPr>
+              <a:lnSpc>
+                <a:spcPts val="2200"/>
+              </a:lnSpc>
+              <a:defRPr sz="2800" b="1">
+                <a:solidFill>
+                  <a:srgbClr val="1A1A2E"/>
+                </a:solidFill>
+                <a:latin typeface="Calibri"/>
+              </a:defRPr>
+            </a:pPr>
+            <a:r>
+              <a:t>Exercises</a:t>
+            </a:r>
+          </a:p>
+        </p:txBody>
+      </p:sp>
+      <p:sp>
+        <p:nvSpPr>
+          <p:cNvPr id="3" name="TextBox 2"/>
+          <p:cNvSpPr txBox="1"/>
+          <p:nvPr/>
+        </p:nvSpPr>
+        <p:spPr>
+          <a:xfrm>
+            <a:off x="548640" y="1234440"/>
+            <a:ext cx="11064240" cy="4937760"/>
+          </a:xfrm>
+          <a:prstGeom prst="rect">
+            <a:avLst/>
+          </a:prstGeom>
+          <a:noFill/>
+        </p:spPr>
+        <p:txBody>
+          <a:bodyPr wrap="square">
+            <a:noAutofit/>
+          </a:bodyPr>
+          <a:lstStyle/>
+          <a:p>
+            <a:pPr>
+              <a:lnSpc>
+                <a:spcPts val="2200"/>
+              </a:lnSpc>
+              <a:spcAft>
+                <a:spcPts val="1000"/>
+              </a:spcAft>
+              <a:defRPr sz="2000" b="0">
+                <a:solidFill>
+                  <a:srgbClr val="333333"/>
+                </a:solidFill>
+                <a:latin typeface="Calibri"/>
+              </a:defRPr>
+            </a:pPr>
+            <a:r>
+              <a:t>• DMA Verification</a:t>
+            </a:r>
+          </a:p>
+          <a:p>
+            <a:pPr>
+              <a:lnSpc>
+                <a:spcPts val="2200"/>
+              </a:lnSpc>
+              <a:spcAft>
+                <a:spcPts val="1000"/>
+              </a:spcAft>
+              <a:defRPr sz="2000" b="0">
+                <a:solidFill>
+                  <a:srgbClr val="333333"/>
+                </a:solidFill>
+                <a:latin typeface="Calibri"/>
+              </a:defRPr>
+            </a:pPr>
+            <a:r>
+              <a:t>• Protocol Verification</a:t>
+            </a:r>
+          </a:p>
+          <a:p>
+            <a:pPr>
+              <a:lnSpc>
+                <a:spcPts val="2200"/>
+              </a:lnSpc>
+              <a:spcAft>
+                <a:spcPts val="1000"/>
+              </a:spcAft>
+              <a:defRPr sz="2000" b="0">
+                <a:solidFill>
+                  <a:srgbClr val="333333"/>
+                </a:solidFill>
+                <a:latin typeface="Calibri"/>
+              </a:defRPr>
+            </a:pPr>
+            <a:r>
+              <a:t>• VIP Development</a:t>
+            </a:r>
+          </a:p>
+          <a:p>
+            <a:pPr>
+              <a:lnSpc>
+                <a:spcPts val="2200"/>
+              </a:lnSpc>
+              <a:spcAft>
+                <a:spcPts val="1000"/>
+              </a:spcAft>
+              <a:defRPr sz="2000" b="0">
+                <a:solidFill>
+                  <a:srgbClr val="333333"/>
+                </a:solidFill>
+                <a:latin typeface="Calibri"/>
+              </a:defRPr>
+            </a:pPr>
+            <a:r>
+              <a:t>• Best Practices</a:t>
+            </a:r>
+          </a:p>
+          <a:p>
+            <a:pPr>
+              <a:lnSpc>
+                <a:spcPts val="2200"/>
+              </a:lnSpc>
+              <a:spcAft>
+                <a:spcPts val="1000"/>
+              </a:spcAft>
+              <a:defRPr sz="2000" b="0">
+                <a:solidFill>
+                  <a:srgbClr val="333333"/>
+                </a:solidFill>
+                <a:latin typeface="Calibri"/>
+              </a:defRPr>
+            </a:pPr>
+            <a:r>
+              <a:t>• System-Level Verification</a:t>
+            </a:r>
+          </a:p>
+        </p:txBody>
+      </p:sp>
+      <p:sp>
+        <p:nvSpPr>
+          <p:cNvPr id="4" name="TextBox 3"/>
+          <p:cNvSpPr txBox="1"/>
+          <p:nvPr/>
+        </p:nvSpPr>
+        <p:spPr>
+          <a:xfrm>
+            <a:off x="548640" y="6355080"/>
+            <a:ext cx="11064240" cy="320040"/>
+          </a:xfrm>
+          <a:prstGeom prst="rect">
+            <a:avLst/>
+          </a:prstGeom>
+          <a:noFill/>
+        </p:spPr>
+        <p:txBody>
+          <a:bodyPr wrap="square">
+            <a:noAutofit/>
+          </a:bodyPr>
+          <a:lstStyle/>
+          <a:p>
+            <a:pPr algn="r">
+              <a:lnSpc>
+                <a:spcPts val="2200"/>
+              </a:lnSpc>
+              <a:defRPr sz="1000" b="0">
+                <a:solidFill>
+                  <a:srgbClr val="666666"/>
+                </a:solidFill>
+                <a:latin typeface="Calibri"/>
+              </a:defRPr>
+            </a:pPr>
+            <a:r>
+              <a:t>learn_uvm2017_sv_verilator / Module 7</a:t>
+            </a:r>
+          </a:p>
+        </p:txBody>
+      </p:sp>
+    </p:spTree>
+  </p:cSld>
+  <p:clrMapOvr>
+    <a:masterClrMapping/>
+  </p:clrMapOvr>
+</p:sld>
+</file>
+
 <file path=ppt/slides/slide7.xml><?xml version="1.0" encoding="utf-8"?>
 <p:sld xmlns:a="http://schemas.openxmlformats.org/drawingml/2006/main" xmlns:p="http://schemas.openxmlformats.org/presentationml/2006/main" xmlns:r="http://schemas.openxmlformats.org/officeDocument/2006/relationships">
   <p:cSld>
@@ -19844,6 +23106,434 @@
             </a:pPr>
             <a:r>
               <a:t>• DMA Patterns</a:t>
+            </a:r>
+          </a:p>
+        </p:txBody>
+      </p:sp>
+      <p:sp>
+        <p:nvSpPr>
+          <p:cNvPr id="4" name="TextBox 3"/>
+          <p:cNvSpPr txBox="1"/>
+          <p:nvPr/>
+        </p:nvSpPr>
+        <p:spPr>
+          <a:xfrm>
+            <a:off x="548640" y="6355080"/>
+            <a:ext cx="11064240" cy="320040"/>
+          </a:xfrm>
+          <a:prstGeom prst="rect">
+            <a:avLst/>
+          </a:prstGeom>
+          <a:noFill/>
+        </p:spPr>
+        <p:txBody>
+          <a:bodyPr wrap="square">
+            <a:noAutofit/>
+          </a:bodyPr>
+          <a:lstStyle/>
+          <a:p>
+            <a:pPr algn="r">
+              <a:lnSpc>
+                <a:spcPts val="2200"/>
+              </a:lnSpc>
+              <a:defRPr sz="1000" b="0">
+                <a:solidFill>
+                  <a:srgbClr val="666666"/>
+                </a:solidFill>
+                <a:latin typeface="Calibri"/>
+              </a:defRPr>
+            </a:pPr>
+            <a:r>
+              <a:t>learn_uvm2017_sv_verilator / Module 7</a:t>
+            </a:r>
+          </a:p>
+        </p:txBody>
+      </p:sp>
+    </p:spTree>
+  </p:cSld>
+  <p:clrMapOvr>
+    <a:masterClrMapping/>
+  </p:clrMapOvr>
+</p:sld>
+</file>
+
+<file path=ppt/slides/slide70.xml><?xml version="1.0" encoding="utf-8"?>
+<p:sld xmlns:a="http://schemas.openxmlformats.org/drawingml/2006/main" xmlns:p="http://schemas.openxmlformats.org/presentationml/2006/main" xmlns:r="http://schemas.openxmlformats.org/officeDocument/2006/relationships">
+  <p:cSld>
+    <p:spTree>
+      <p:nvGrpSpPr>
+        <p:cNvPr id="1" name=""/>
+        <p:cNvGrpSpPr/>
+        <p:nvPr/>
+      </p:nvGrpSpPr>
+      <p:grpSpPr/>
+      <p:sp>
+        <p:nvSpPr>
+          <p:cNvPr id="2" name="TextBox 1"/>
+          <p:cNvSpPr txBox="1"/>
+          <p:nvPr/>
+        </p:nvSpPr>
+        <p:spPr>
+          <a:xfrm>
+            <a:off x="548640" y="411480"/>
+            <a:ext cx="11064240" cy="777240"/>
+          </a:xfrm>
+          <a:prstGeom prst="rect">
+            <a:avLst/>
+          </a:prstGeom>
+          <a:noFill/>
+        </p:spPr>
+        <p:txBody>
+          <a:bodyPr wrap="square">
+            <a:noAutofit/>
+          </a:bodyPr>
+          <a:lstStyle/>
+          <a:p>
+            <a:pPr>
+              <a:lnSpc>
+                <a:spcPts val="2200"/>
+              </a:lnSpc>
+              <a:defRPr sz="2800" b="1">
+                <a:solidFill>
+                  <a:srgbClr val="1A1A2E"/>
+                </a:solidFill>
+                <a:latin typeface="Calibri"/>
+              </a:defRPr>
+            </a:pPr>
+            <a:r>
+              <a:t>Assessment checklist</a:t>
+            </a:r>
+          </a:p>
+        </p:txBody>
+      </p:sp>
+      <p:sp>
+        <p:nvSpPr>
+          <p:cNvPr id="3" name="TextBox 2"/>
+          <p:cNvSpPr txBox="1"/>
+          <p:nvPr/>
+        </p:nvSpPr>
+        <p:spPr>
+          <a:xfrm>
+            <a:off x="548640" y="1234440"/>
+            <a:ext cx="11064240" cy="4937760"/>
+          </a:xfrm>
+          <a:prstGeom prst="rect">
+            <a:avLst/>
+          </a:prstGeom>
+          <a:noFill/>
+        </p:spPr>
+        <p:txBody>
+          <a:bodyPr wrap="square">
+            <a:noAutofit/>
+          </a:bodyPr>
+          <a:lstStyle/>
+          <a:p>
+            <a:pPr>
+              <a:lnSpc>
+                <a:spcPts val="2200"/>
+              </a:lnSpc>
+              <a:spcAft>
+                <a:spcPts val="1000"/>
+              </a:spcAft>
+              <a:defRPr sz="2000" b="0">
+                <a:solidFill>
+                  <a:srgbClr val="333333"/>
+                </a:solidFill>
+                <a:latin typeface="Calibri"/>
+              </a:defRPr>
+            </a:pPr>
+            <a:r>
+              <a:t>• Can verify complex designs (DMA, protocols)</a:t>
+            </a:r>
+          </a:p>
+          <a:p>
+            <a:pPr>
+              <a:lnSpc>
+                <a:spcPts val="2200"/>
+              </a:lnSpc>
+              <a:spcAft>
+                <a:spcPts val="1000"/>
+              </a:spcAft>
+              <a:defRPr sz="2000" b="0">
+                <a:solidFill>
+                  <a:srgbClr val="333333"/>
+                </a:solidFill>
+                <a:latin typeface="Calibri"/>
+              </a:defRPr>
+            </a:pPr>
+            <a:r>
+              <a:t>• Can develop reusable VIP</a:t>
+            </a:r>
+          </a:p>
+          <a:p>
+            <a:pPr>
+              <a:lnSpc>
+                <a:spcPts val="2200"/>
+              </a:lnSpc>
+              <a:spcAft>
+                <a:spcPts val="1000"/>
+              </a:spcAft>
+              <a:defRPr sz="2000" b="0">
+                <a:solidFill>
+                  <a:srgbClr val="333333"/>
+                </a:solidFill>
+                <a:latin typeface="Calibri"/>
+              </a:defRPr>
+            </a:pPr>
+            <a:r>
+              <a:t>• Can apply best practices</a:t>
+            </a:r>
+          </a:p>
+          <a:p>
+            <a:pPr>
+              <a:lnSpc>
+                <a:spcPts val="2200"/>
+              </a:lnSpc>
+              <a:spcAft>
+                <a:spcPts val="1000"/>
+              </a:spcAft>
+              <a:defRPr sz="2000" b="0">
+                <a:solidFill>
+                  <a:srgbClr val="333333"/>
+                </a:solidFill>
+                <a:latin typeface="Calibri"/>
+              </a:defRPr>
+            </a:pPr>
+            <a:r>
+              <a:t>• Can perform system-level verification</a:t>
+            </a:r>
+          </a:p>
+          <a:p>
+            <a:pPr>
+              <a:lnSpc>
+                <a:spcPts val="2200"/>
+              </a:lnSpc>
+              <a:spcAft>
+                <a:spcPts val="1000"/>
+              </a:spcAft>
+              <a:defRPr sz="2000" b="0">
+                <a:solidFill>
+                  <a:srgbClr val="333333"/>
+                </a:solidFill>
+                <a:latin typeface="Calibri"/>
+              </a:defRPr>
+            </a:pPr>
+            <a:r>
+              <a:t>• Can create production-quality testbenches</a:t>
+            </a:r>
+          </a:p>
+          <a:p>
+            <a:pPr>
+              <a:lnSpc>
+                <a:spcPts val="2200"/>
+              </a:lnSpc>
+              <a:spcAft>
+                <a:spcPts val="1000"/>
+              </a:spcAft>
+              <a:defRPr sz="2000" b="0">
+                <a:solidFill>
+                  <a:srgbClr val="333333"/>
+                </a:solidFill>
+                <a:latin typeface="Calibri"/>
+              </a:defRPr>
+            </a:pPr>
+            <a:r>
+              <a:t>• Understands protocol verification patterns</a:t>
+            </a:r>
+          </a:p>
+        </p:txBody>
+      </p:sp>
+      <p:sp>
+        <p:nvSpPr>
+          <p:cNvPr id="4" name="TextBox 3"/>
+          <p:cNvSpPr txBox="1"/>
+          <p:nvPr/>
+        </p:nvSpPr>
+        <p:spPr>
+          <a:xfrm>
+            <a:off x="548640" y="6355080"/>
+            <a:ext cx="11064240" cy="320040"/>
+          </a:xfrm>
+          <a:prstGeom prst="rect">
+            <a:avLst/>
+          </a:prstGeom>
+          <a:noFill/>
+        </p:spPr>
+        <p:txBody>
+          <a:bodyPr wrap="square">
+            <a:noAutofit/>
+          </a:bodyPr>
+          <a:lstStyle/>
+          <a:p>
+            <a:pPr algn="r">
+              <a:lnSpc>
+                <a:spcPts val="2200"/>
+              </a:lnSpc>
+              <a:defRPr sz="1000" b="0">
+                <a:solidFill>
+                  <a:srgbClr val="666666"/>
+                </a:solidFill>
+                <a:latin typeface="Calibri"/>
+              </a:defRPr>
+            </a:pPr>
+            <a:r>
+              <a:t>learn_uvm2017_sv_verilator / Module 7</a:t>
+            </a:r>
+          </a:p>
+        </p:txBody>
+      </p:sp>
+    </p:spTree>
+  </p:cSld>
+  <p:clrMapOvr>
+    <a:masterClrMapping/>
+  </p:clrMapOvr>
+</p:sld>
+</file>
+
+<file path=ppt/slides/slide71.xml><?xml version="1.0" encoding="utf-8"?>
+<p:sld xmlns:a="http://schemas.openxmlformats.org/drawingml/2006/main" xmlns:p="http://schemas.openxmlformats.org/presentationml/2006/main" xmlns:r="http://schemas.openxmlformats.org/officeDocument/2006/relationships">
+  <p:cSld>
+    <p:spTree>
+      <p:nvGrpSpPr>
+        <p:cNvPr id="1" name=""/>
+        <p:cNvGrpSpPr/>
+        <p:nvPr/>
+      </p:nvGrpSpPr>
+      <p:grpSpPr/>
+      <p:sp>
+        <p:nvSpPr>
+          <p:cNvPr id="2" name="TextBox 1"/>
+          <p:cNvSpPr txBox="1"/>
+          <p:nvPr/>
+        </p:nvSpPr>
+        <p:spPr>
+          <a:xfrm>
+            <a:off x="548640" y="411480"/>
+            <a:ext cx="11064240" cy="777240"/>
+          </a:xfrm>
+          <a:prstGeom prst="rect">
+            <a:avLst/>
+          </a:prstGeom>
+          <a:noFill/>
+        </p:spPr>
+        <p:txBody>
+          <a:bodyPr wrap="square">
+            <a:noAutofit/>
+          </a:bodyPr>
+          <a:lstStyle/>
+          <a:p>
+            <a:pPr>
+              <a:lnSpc>
+                <a:spcPts val="2200"/>
+              </a:lnSpc>
+              <a:defRPr sz="2800" b="1">
+                <a:solidFill>
+                  <a:srgbClr val="1A1A2E"/>
+                </a:solidFill>
+                <a:latin typeface="Calibri"/>
+              </a:defRPr>
+            </a:pPr>
+            <a:r>
+              <a:t>Summary &amp; next steps</a:t>
+            </a:r>
+          </a:p>
+        </p:txBody>
+      </p:sp>
+      <p:sp>
+        <p:nvSpPr>
+          <p:cNvPr id="3" name="TextBox 2"/>
+          <p:cNvSpPr txBox="1"/>
+          <p:nvPr/>
+        </p:nvSpPr>
+        <p:spPr>
+          <a:xfrm>
+            <a:off x="548640" y="1234440"/>
+            <a:ext cx="11064240" cy="4937760"/>
+          </a:xfrm>
+          <a:prstGeom prst="rect">
+            <a:avLst/>
+          </a:prstGeom>
+          <a:noFill/>
+        </p:spPr>
+        <p:txBody>
+          <a:bodyPr wrap="square">
+            <a:noAutofit/>
+          </a:bodyPr>
+          <a:lstStyle/>
+          <a:p>
+            <a:pPr>
+              <a:lnSpc>
+                <a:spcPts val="2200"/>
+              </a:lnSpc>
+              <a:spcAft>
+                <a:spcPts val="1000"/>
+              </a:spcAft>
+              <a:defRPr sz="2000" b="0">
+                <a:solidFill>
+                  <a:srgbClr val="333333"/>
+                </a:solidFill>
+                <a:latin typeface="Calibri"/>
+              </a:defRPr>
+            </a:pPr>
+            <a:r>
+              <a:t>• Apply UVM to real-world verification scenarios</a:t>
+            </a:r>
+          </a:p>
+          <a:p>
+            <a:pPr>
+              <a:lnSpc>
+                <a:spcPts val="2200"/>
+              </a:lnSpc>
+              <a:spcAft>
+                <a:spcPts val="1000"/>
+              </a:spcAft>
+              <a:defRPr sz="2000" b="0">
+                <a:solidFill>
+                  <a:srgbClr val="333333"/>
+                </a:solidFill>
+                <a:latin typeface="Calibri"/>
+              </a:defRPr>
+            </a:pPr>
+            <a:r>
+              <a:t>• Complete module7/CHECKLIST.md</a:t>
+            </a:r>
+          </a:p>
+          <a:p>
+            <a:pPr>
+              <a:lnSpc>
+                <a:spcPts val="2200"/>
+              </a:lnSpc>
+              <a:spcAft>
+                <a:spcPts val="1000"/>
+              </a:spcAft>
+              <a:defRPr sz="2000" b="0">
+                <a:solidFill>
+                  <a:srgbClr val="333333"/>
+                </a:solidFill>
+                <a:latin typeface="Calibri"/>
+              </a:defRPr>
+            </a:pPr>
+            <a:r>
+              <a:t>• Review module7/EXAMPLES.md and run each lab</a:t>
+            </a:r>
+          </a:p>
+          <a:p>
+            <a:pPr>
+              <a:lnSpc>
+                <a:spcPts val="2200"/>
+              </a:lnSpc>
+              <a:spcAft>
+                <a:spcPts val="1000"/>
+              </a:spcAft>
+              <a:defRPr sz="2000" b="0">
+                <a:solidFill>
+                  <a:srgbClr val="333333"/>
+                </a:solidFill>
+                <a:latin typeface="Calibri"/>
+              </a:defRPr>
+            </a:pPr>
+            <a:r>
+              <a:t>• Next: Next module in course</a:t>
             </a:r>
           </a:p>
         </p:txBody>
